--- a/presentation/dormsense-intro/XiaoXi-DormSense-项目介绍.pptx
+++ b/presentation/dormsense-intro/XiaoXi-DormSense-项目介绍.pptx
@@ -17,9 +17,10 @@
     <p:sldId id="265" r:id="rId11"/>
     <p:sldId id="266" r:id="rId12"/>
     <p:sldId id="267" r:id="rId13"/>
+    <p:sldId id="268" r:id="rId14"/>
   </p:sldIdLst>
   <p:notesMasterIdLst>
-    <p:notesMasterId r:id="rId14"/>
+    <p:notesMasterId r:id="rId15"/>
   </p:notesMasterIdLst>
   <p:sldSz cx="12192000" cy="6858000"/>
   <p:notesSz cx="6858000" cy="12192000"/>
@@ -604,11 +605,11 @@
           <a:p>
             <a:r>
               <a:rPr lang="en-US" dirty="0"/>
-              <a:t>已有骨架，不等于链路完成
-• 已有协议、Schema、模拟器和配置样例
-• UNO R4 WiFi 已确认
-• 真实 MQTT、HA、Hermes 与硬件联调仍待完成
-• 没有证据的能力保持 Planned</a:t>
+              <a:t>先读状态，再解释；控制以后再开
+• 用户先提出问题
+• Agent 读取 HA 状态并说明时效
+• 先给解释与建议
+• 未来控制必须经过确认和状态回读</a:t>
             </a:r>
             <a:endParaRPr lang="en-US" dirty="0"/>
           </a:p>
@@ -696,10 +697,11 @@
           <a:p>
             <a:r>
               <a:rPr lang="en-US" dirty="0"/>
-              <a:t>未来可以长成什么样
-• 扩展 TTS、无线节点与更多物理量
-• 历史分析与异常检测对应课程目标
-• 控制只在 HA 路径和权限边界验证后开放</a:t>
+              <a:t>已有骨架，不等于链路完成
+• 已有协议、Schema、模拟器和配置样例
+• UNO R4 WiFi 已确认
+• 真实 MQTT、HA、Hermes 与硬件联调仍待完成
+• 没有证据的能力保持 Planned</a:t>
             </a:r>
             <a:endParaRPr lang="en-US" dirty="0"/>
           </a:p>
@@ -787,10 +789,10 @@
           <a:p>
             <a:r>
               <a:rPr lang="en-US" dirty="0"/>
-              <a:t>先感知，再理解
-• 从真实宿舍微环境问题出发
-• 让传感器、Arduino、平台和 Agent 各司其职
-• 先验证真实链路与边界，再扩展语音、无线和控制</a:t>
+              <a:t>未来可以长成什么样
+• 扩展 TTS、无线节点与更多物理量
+• 历史分析与异常检测对应课程目标
+• 控制只在 HA 路径和权限边界验证后开放</a:t>
             </a:r>
             <a:endParaRPr lang="en-US" dirty="0"/>
           </a:p>
@@ -814,6 +816,97 @@
             <a:fld id="{F7021451-1387-4CA6-816F-3879F97B5CBC}" type="slidenum">
               <a:rPr lang="en-US"/>
               <a:t>12</a:t>
+            </a:fld>
+            <a:endParaRPr lang="en-US"/>
+          </a:p>
+        </p:txBody>
+      </p:sp>
+    </p:spTree>
+    <p:extLst>
+      <p:ext uri="{BB962C8B-B14F-4D97-AF65-F5344CB8AC3E}">
+        <p14:creationId xmlns:p14="http://schemas.microsoft.com/office/powerpoint/2010/main" val="1024086991"/>
+      </p:ext>
+    </p:extLst>
+  </p:cSld>
+  <p:clrMapOvr>
+    <a:masterClrMapping/>
+  </p:clrMapOvr>
+</p:notes>
+</file>
+
+<file path=ppt/notesSlides/notesSlide13.xml><?xml version="1.0" encoding="utf-8"?>
+<p:notes xmlns:a="http://schemas.openxmlformats.org/drawingml/2006/main" xmlns:r="http://schemas.openxmlformats.org/officeDocument/2006/relationships" xmlns:p="http://schemas.openxmlformats.org/presentationml/2006/main">
+  <p:cSld>
+    <p:spTree>
+      <p:nvGrpSpPr>
+        <p:cNvPr id="1" name=""/>
+        <p:cNvGrpSpPr/>
+        <p:nvPr/>
+      </p:nvGrpSpPr>
+      <p:grpSpPr>
+        <a:xfrm>
+          <a:off x="0" y="0"/>
+          <a:ext cx="0" cy="0"/>
+          <a:chOff x="0" y="0"/>
+          <a:chExt cx="0" cy="0"/>
+        </a:xfrm>
+      </p:grpSpPr>
+      <p:sp>
+        <p:nvSpPr>
+          <p:cNvPr id="2" name="Slide Image Placeholder 1"/>
+          <p:cNvSpPr>
+            <a:spLocks noGrp="1" noRot="1" noChangeAspect="1"/>
+          </p:cNvSpPr>
+          <p:nvPr>
+            <p:ph type="sldImg"/>
+          </p:nvPr>
+        </p:nvSpPr>
+        <p:spPr/>
+      </p:sp>
+      <p:sp>
+        <p:nvSpPr>
+          <p:cNvPr id="3" name="Notes Placeholder 2"/>
+          <p:cNvSpPr>
+            <a:spLocks noGrp="1"/>
+          </p:cNvSpPr>
+          <p:nvPr>
+            <p:ph type="body" idx="1"/>
+          </p:nvPr>
+        </p:nvSpPr>
+        <p:spPr/>
+        <p:txBody>
+          <a:bodyPr/>
+          <a:lstStyle/>
+          <a:p>
+            <a:r>
+              <a:rPr lang="en-US" dirty="0"/>
+              <a:t>先感知，再理解
+• 从真实宿舍微环境问题出发
+• 让传感器、Arduino、平台和 Agent 各司其职
+• 先验证真实链路与边界，再扩展语音、无线和控制</a:t>
+            </a:r>
+            <a:endParaRPr lang="en-US" dirty="0"/>
+          </a:p>
+        </p:txBody>
+      </p:sp>
+      <p:sp>
+        <p:nvSpPr>
+          <p:cNvPr id="4" name="Slide Number Placeholder 3"/>
+          <p:cNvSpPr>
+            <a:spLocks noGrp="1"/>
+          </p:cNvSpPr>
+          <p:nvPr>
+            <p:ph type="sldNum" sz="quarter" idx="10"/>
+          </p:nvPr>
+        </p:nvSpPr>
+        <p:spPr/>
+        <p:txBody>
+          <a:bodyPr/>
+          <a:lstStyle/>
+          <a:p>
+            <a:fld id="{F7021451-1387-4CA6-816F-3879F97B5CBC}" type="slidenum">
+              <a:rPr lang="en-US"/>
+              <a:t>13</a:t>
             </a:fld>
             <a:endParaRPr lang="en-US"/>
           </a:p>
@@ -1518,11 +1611,11 @@
           <a:p>
             <a:r>
               <a:rPr lang="en-US" dirty="0"/>
-              <a:t>先读状态，再解释；控制以后再开
-• 用户先提出问题
-• Agent 读取 HA 状态并说明时效
-• 先给解释与建议
-• 未来控制必须经过确认和状态回读</a:t>
+              <a:t>选择 Hermes，不只靠口号
+• 截图记录于 2026-09-22，筛选条件为 This Month
+• Hermes Agent 以 50.8T tokens 排名第一
+• 第二名 Claude Code 为 21.1T，前者约为后者 2.4 倍
+• 这是动态使用量快照，不等于能力或安全性排名</a:t>
             </a:r>
             <a:endParaRPr lang="en-US" dirty="0"/>
           </a:p>
@@ -1618,54 +1711,6 @@
           <a:chExt cx="0" cy="0"/>
         </a:xfrm>
       </p:grpSpPr>
-      <p:sp>
-        <p:nvSpPr>
-          <p:cNvPr id="25" name="Slide Number Placeholder 0"/>
-          <p:cNvSpPr>
-            <a:spLocks noGrp="1"/>
-          </p:cNvSpPr>
-          <p:nvPr>
-            <p:ph type="sldNum" sz="quarter" idx="4294967295"/>
-          </p:nvPr>
-        </p:nvSpPr>
-        <p:spPr>
-          <a:xfrm>
-            <a:off x="11155680" y="256032"/>
-            <a:ext cx="594360" cy="164592"/>
-          </a:xfrm>
-          <a:prstGeom prst="rect">
-            <a:avLst/>
-          </a:prstGeom>
-          <a:extLst>
-            <a:ext uri="{C572A759-6A51-4108-AA02-DFA0A04FC94B}">
-              <ma14:wrappingTextBoxFlag xmlns:ma14="http://schemas.microsoft.com/office/mac/drawingml/2011/main" val="0"/>
-            </a:ext>
-          </a:extLst>
-        </p:spPr>
-        <p:txBody>
-          <a:bodyPr lIns="0" tIns="0" rIns="0" bIns="0"/>
-          <a:lstStyle>
-            <a:lvl1pPr>
-              <a:defRPr sz="800">
-                <a:solidFill>
-                  <a:srgbClr val="737373"/>
-                </a:solidFill>
-                <a:latin typeface="JetBrains Mono"/>
-                <a:ea typeface="JetBrains Mono"/>
-                <a:cs typeface="JetBrains Mono"/>
-              </a:defRPr>
-            </a:lvl1pPr>
-          </a:lstStyle>
-          <a:p>
-            <a:pPr algn="r"/>
-            <a:fld id="{F7021451-1387-4CA6-816F-3879F97B5CBC}" type="slidenum">
-              <a:rPr b="0" lang="en-US"/>
-              <a:t>1002</a:t>
-            </a:fld>
-            <a:endParaRPr lang="en-US"/>
-          </a:p>
-        </p:txBody>
-      </p:sp>
     </p:spTree>
   </p:cSld>
   <p:clrMapOvr>
@@ -1691,54 +1736,6 @@
           <a:chExt cx="0" cy="0"/>
         </a:xfrm>
       </p:grpSpPr>
-      <p:sp>
-        <p:nvSpPr>
-          <p:cNvPr id="25" name="Slide Number Placeholder 0"/>
-          <p:cNvSpPr>
-            <a:spLocks noGrp="1"/>
-          </p:cNvSpPr>
-          <p:nvPr>
-            <p:ph type="sldNum" sz="quarter" idx="4294967295"/>
-          </p:nvPr>
-        </p:nvSpPr>
-        <p:spPr>
-          <a:xfrm>
-            <a:off x="11155680" y="256032"/>
-            <a:ext cx="594360" cy="164592"/>
-          </a:xfrm>
-          <a:prstGeom prst="rect">
-            <a:avLst/>
-          </a:prstGeom>
-          <a:extLst>
-            <a:ext uri="{C572A759-6A51-4108-AA02-DFA0A04FC94B}">
-              <ma14:wrappingTextBoxFlag xmlns:ma14="http://schemas.microsoft.com/office/mac/drawingml/2011/main" val="0"/>
-            </a:ext>
-          </a:extLst>
-        </p:spPr>
-        <p:txBody>
-          <a:bodyPr lIns="0" tIns="0" rIns="0" bIns="0"/>
-          <a:lstStyle>
-            <a:lvl1pPr>
-              <a:defRPr sz="800">
-                <a:solidFill>
-                  <a:srgbClr val="737373"/>
-                </a:solidFill>
-                <a:latin typeface="JetBrains Mono"/>
-                <a:ea typeface="JetBrains Mono"/>
-                <a:cs typeface="JetBrains Mono"/>
-              </a:defRPr>
-            </a:lvl1pPr>
-          </a:lstStyle>
-          <a:p>
-            <a:pPr algn="r"/>
-            <a:fld id="{F7021451-1387-4CA6-816F-3879F97B5CBC}" type="slidenum">
-              <a:rPr b="0" lang="en-US"/>
-              <a:t>null</a:t>
-            </a:fld>
-            <a:endParaRPr lang="en-US"/>
-          </a:p>
-        </p:txBody>
-      </p:sp>
     </p:spTree>
   </p:cSld>
   <p:clrMap bg1="lt1" tx1="dk1" bg2="lt2" tx2="dk2" accent1="accent1" accent2="accent2" accent3="accent3" accent4="accent4" accent5="accent5" accent6="accent6" hlink="hlink" folHlink="folHlink"/>
@@ -2100,7 +2097,7 @@
                 <a:ea typeface="JetBrains Mono" pitchFamily="34" charset="-122"/>
                 <a:cs typeface="JetBrains Mono" pitchFamily="34" charset="-120"/>
               </a:rPr>
-              <a:t>SWISS · IKB · 01 / 12</a:t>
+              <a:t>SWISS · IKB · 01 / 13</a:t>
             </a:r>
             <a:endParaRPr lang="en-US" sz="800" dirty="0"/>
           </a:p>
@@ -2156,25 +2153,25 @@
         <p:spPr>
           <a:xfrm>
             <a:off x="612648" y="1993392"/>
-            <a:ext cx="5577840" cy="713232"/>
-          </a:xfrm>
-          <a:prstGeom prst="rect">
-            <a:avLst/>
-          </a:prstGeom>
-          <a:noFill/>
-          <a:ln/>
-        </p:spPr>
-        <p:txBody>
-          <a:bodyPr wrap="square" lIns="0" tIns="0" rIns="0" bIns="0" rtlCol="0" anchor="ctr">
-            <a:normAutofit/>
-          </a:bodyPr>
-          <a:lstStyle/>
-          <a:p>
-            <a:pPr algn="l" indent="0" marL="0">
-              <a:buNone/>
-            </a:pPr>
-            <a:r>
-              <a:rPr lang="en-US" sz="5200" dirty="0">
+            <a:ext cx="5303520" cy="658368"/>
+          </a:xfrm>
+          <a:prstGeom prst="rect">
+            <a:avLst/>
+          </a:prstGeom>
+          <a:noFill/>
+          <a:ln/>
+        </p:spPr>
+        <p:txBody>
+          <a:bodyPr wrap="square" lIns="0" tIns="0" rIns="0" bIns="0" rtlCol="0" anchor="ctr">
+            <a:normAutofit/>
+          </a:bodyPr>
+          <a:lstStyle/>
+          <a:p>
+            <a:pPr algn="l" indent="0" marL="0">
+              <a:buNone/>
+            </a:pPr>
+            <a:r>
+              <a:rPr lang="en-US" sz="4700" dirty="0">
                 <a:solidFill>
                   <a:srgbClr val="FFFFFF"/>
                 </a:solidFill>
@@ -2184,7 +2181,7 @@
               </a:rPr>
               <a:t>交小西</a:t>
             </a:r>
-            <a:endParaRPr lang="en-US" sz="5200" dirty="0"/>
+            <a:endParaRPr lang="en-US" sz="4700" dirty="0"/>
           </a:p>
         </p:txBody>
       </p:sp>
@@ -2196,26 +2193,26 @@
         </p:nvSpPr>
         <p:spPr>
           <a:xfrm>
-            <a:off x="612648" y="2651760"/>
-            <a:ext cx="6766560" cy="777240"/>
-          </a:xfrm>
-          <a:prstGeom prst="rect">
-            <a:avLst/>
-          </a:prstGeom>
-          <a:noFill/>
-          <a:ln/>
-        </p:spPr>
-        <p:txBody>
-          <a:bodyPr wrap="square" lIns="0" tIns="0" rIns="0" bIns="0" rtlCol="0" anchor="ctr">
-            <a:normAutofit/>
-          </a:bodyPr>
-          <a:lstStyle/>
-          <a:p>
-            <a:pPr algn="l" indent="0" marL="0">
-              <a:buNone/>
-            </a:pPr>
-            <a:r>
-              <a:rPr lang="en-US" sz="5500" i="1" dirty="0">
+            <a:off x="612648" y="2596896"/>
+            <a:ext cx="5760720" cy="713232"/>
+          </a:xfrm>
+          <a:prstGeom prst="rect">
+            <a:avLst/>
+          </a:prstGeom>
+          <a:noFill/>
+          <a:ln/>
+        </p:spPr>
+        <p:txBody>
+          <a:bodyPr wrap="square" lIns="0" tIns="0" rIns="0" bIns="0" rtlCol="0" anchor="ctr">
+            <a:normAutofit/>
+          </a:bodyPr>
+          <a:lstStyle/>
+          <a:p>
+            <a:pPr algn="l" indent="0" marL="0">
+              <a:buNone/>
+            </a:pPr>
+            <a:r>
+              <a:rPr lang="en-US" sz="4800" i="1" dirty="0">
                 <a:solidFill>
                   <a:srgbClr val="FFFFFF"/>
                 </a:solidFill>
@@ -2225,13 +2222,37 @@
               </a:rPr>
               <a:t>宿舍智能体</a:t>
             </a:r>
-            <a:endParaRPr lang="en-US" sz="5500" dirty="0"/>
-          </a:p>
-        </p:txBody>
-      </p:sp>
-      <p:sp>
-        <p:nvSpPr>
-          <p:cNvPr id="7" name="Shape 5"/>
+            <a:endParaRPr lang="en-US" sz="4800" dirty="0"/>
+          </a:p>
+        </p:txBody>
+      </p:sp>
+      <p:pic>
+        <p:nvPicPr>
+          <p:cNvPr id="7" name="Image 0" descr="presentation/dormsense-intro/images/xiaoxi-dormsense-logo.png">    </p:cNvPr>
+          <p:cNvPicPr>
+            <a:picLocks noChangeAspect="1"/>
+          </p:cNvPicPr>
+          <p:nvPr/>
+        </p:nvPicPr>
+        <p:blipFill>
+          <a:blip r:embed="rId1"/>
+          <a:stretch>
+            <a:fillRect/>
+          </a:stretch>
+        </p:blipFill>
+        <p:spPr>
+          <a:xfrm>
+            <a:off x="7360920" y="1024128"/>
+            <a:ext cx="4069080" cy="4069080"/>
+          </a:xfrm>
+          <a:prstGeom prst="rect">
+            <a:avLst/>
+          </a:prstGeom>
+        </p:spPr>
+      </p:pic>
+      <p:sp>
+        <p:nvSpPr>
+          <p:cNvPr id="8" name="Shape 5"/>
           <p:cNvSpPr/>
           <p:nvPr/>
         </p:nvSpPr>
@@ -2254,7 +2275,7 @@
       </p:sp>
       <p:sp>
         <p:nvSpPr>
-          <p:cNvPr id="8" name="Text 6"/>
+          <p:cNvPr id="9" name="Text 6"/>
           <p:cNvSpPr txBox="1"/>
           <p:nvPr/>
         </p:nvSpPr>
@@ -2295,7 +2316,7 @@
       </p:sp>
       <p:sp>
         <p:nvSpPr>
-          <p:cNvPr id="9" name="Text 7"/>
+          <p:cNvPr id="10" name="Text 7"/>
           <p:cNvSpPr txBox="1"/>
           <p:nvPr/>
         </p:nvSpPr>
@@ -2336,7 +2357,7 @@
       </p:sp>
       <p:sp>
         <p:nvSpPr>
-          <p:cNvPr id="10" name="Text 8"/>
+          <p:cNvPr id="11" name="Text 8"/>
           <p:cNvSpPr txBox="1"/>
           <p:nvPr/>
         </p:nvSpPr>
@@ -2386,6 +2407,13 @@
 <file path=ppt/slides/slide10.xml><?xml version="1.0" encoding="utf-8"?>
 <p:sld xmlns:a="http://schemas.openxmlformats.org/drawingml/2006/main" xmlns:r="http://schemas.openxmlformats.org/officeDocument/2006/relationships" xmlns:p="http://schemas.openxmlformats.org/presentationml/2006/main">
   <p:cSld name="Slide 10">
+    <p:bg>
+      <p:bgPr>
+        <a:solidFill>
+          <a:srgbClr val="0A0A0A"/>
+        </a:solidFill>
+      </p:bgPr>
+    </p:bg>
     <p:spTree>
       <p:nvGrpSpPr>
         <p:cNvPr id="1" name=""/>
@@ -2429,13 +2457,13 @@
             <a:r>
               <a:rPr lang="en-US" sz="800" spc="210" kern="0" dirty="0">
                 <a:solidFill>
-                  <a:srgbClr val="737373"/>
+                  <a:srgbClr val="B8B8B8"/>
                 </a:solidFill>
                 <a:latin typeface="JetBrains Mono" pitchFamily="34" charset="0"/>
                 <a:ea typeface="JetBrains Mono" pitchFamily="34" charset="-122"/>
                 <a:cs typeface="JetBrains Mono" pitchFamily="34" charset="-120"/>
               </a:rPr>
-              <a:t>STATUS · EVIDENCE FIRST</a:t>
+              <a:t>INTERACTION · CONTROLLED LOOP</a:t>
             </a:r>
             <a:endParaRPr lang="en-US" sz="800" dirty="0"/>
           </a:p>
@@ -2470,13 +2498,13 @@
             <a:r>
               <a:rPr lang="en-US" sz="800" spc="210" kern="0" dirty="0">
                 <a:solidFill>
-                  <a:srgbClr val="737373"/>
+                  <a:srgbClr val="B8B8B8"/>
                 </a:solidFill>
                 <a:latin typeface="JetBrains Mono" pitchFamily="34" charset="0"/>
                 <a:ea typeface="JetBrains Mono" pitchFamily="34" charset="-122"/>
                 <a:cs typeface="JetBrains Mono" pitchFamily="34" charset="-120"/>
               </a:rPr>
-              <a:t>10 / 12</a:t>
+              <a:t>10 / 13</a:t>
             </a:r>
             <a:endParaRPr lang="en-US" sz="800" dirty="0"/>
           </a:p>
@@ -2511,13 +2539,13 @@
             <a:r>
               <a:rPr lang="en-US" sz="900" spc="130" kern="0" dirty="0">
                 <a:solidFill>
-                  <a:srgbClr val="737373"/>
+                  <a:srgbClr val="9C9C9C"/>
                 </a:solidFill>
                 <a:latin typeface="PingFang SC" pitchFamily="34" charset="0"/>
                 <a:ea typeface="PingFang SC" pitchFamily="34" charset="-122"/>
                 <a:cs typeface="PingFang SC" pitchFamily="34" charset="-120"/>
               </a:rPr>
-              <a:t>规划介绍最重要的是不把未来写成现在</a:t>
+              <a:t>不是“说一句就随便执行”</a:t>
             </a:r>
             <a:endParaRPr lang="en-US" sz="900" dirty="0"/>
           </a:p>
@@ -2550,17 +2578,17 @@
               <a:buNone/>
             </a:pPr>
             <a:r>
-              <a:rPr lang="en-US" sz="2900" dirty="0">
-                <a:solidFill>
-                  <a:srgbClr val="0A0A0A"/>
+              <a:rPr lang="en-US" sz="2800" dirty="0">
+                <a:solidFill>
+                  <a:srgbClr val="FAFAF8"/>
                 </a:solidFill>
                 <a:latin typeface="PingFang SC" pitchFamily="34" charset="0"/>
                 <a:ea typeface="PingFang SC" pitchFamily="34" charset="-122"/>
                 <a:cs typeface="PingFang SC" pitchFamily="34" charset="-120"/>
               </a:rPr>
-              <a:t>已有骨架，不等于链路完成</a:t>
-            </a:r>
-            <a:endParaRPr lang="en-US" sz="2900" dirty="0"/>
+              <a:t>先读状态，再解释；控制以后再开</a:t>
+            </a:r>
+            <a:endParaRPr lang="en-US" sz="2800" dirty="0"/>
           </a:p>
         </p:txBody>
       </p:sp>
@@ -2572,8 +2600,8 @@
         </p:nvSpPr>
         <p:spPr>
           <a:xfrm>
-            <a:off x="6089904" y="1865376"/>
-            <a:ext cx="0" cy="4133088"/>
+            <a:off x="612648" y="1828800"/>
+            <a:ext cx="4297680" cy="0"/>
           </a:xfrm>
           <a:prstGeom prst="line">
             <a:avLst/>
@@ -2581,7 +2609,7 @@
           <a:noFill/>
           <a:ln w="8890">
             <a:solidFill>
-              <a:srgbClr val="D4D4D2"/>
+              <a:srgbClr val="363636"/>
             </a:solidFill>
             <a:prstDash val="solid"/>
           </a:ln>
@@ -2595,36 +2623,36 @@
         </p:nvSpPr>
         <p:spPr>
           <a:xfrm>
-            <a:off x="658368" y="1792224"/>
-            <a:ext cx="4389120" cy="228600"/>
-          </a:xfrm>
-          <a:prstGeom prst="rect">
-            <a:avLst/>
-          </a:prstGeom>
-          <a:noFill/>
-          <a:ln/>
-        </p:spPr>
-        <p:txBody>
-          <a:bodyPr wrap="square" lIns="0" tIns="0" rIns="0" bIns="0" rtlCol="0" anchor="ctr">
-            <a:normAutofit/>
-          </a:bodyPr>
-          <a:lstStyle/>
-          <a:p>
-            <a:pPr algn="l" indent="0" marL="0">
-              <a:buNone/>
-            </a:pPr>
-            <a:r>
-              <a:rPr lang="en-US" sz="900" spc="170" kern="0" dirty="0">
-                <a:solidFill>
-                  <a:srgbClr val="737373"/>
+            <a:off x="612648" y="2121408"/>
+            <a:ext cx="347472" cy="201168"/>
+          </a:xfrm>
+          <a:prstGeom prst="rect">
+            <a:avLst/>
+          </a:prstGeom>
+          <a:noFill/>
+          <a:ln/>
+        </p:spPr>
+        <p:txBody>
+          <a:bodyPr wrap="square" lIns="0" tIns="0" rIns="0" bIns="0" rtlCol="0" anchor="ctr">
+            <a:normAutofit/>
+          </a:bodyPr>
+          <a:lstStyle/>
+          <a:p>
+            <a:pPr algn="l" indent="0" marL="0">
+              <a:buNone/>
+            </a:pPr>
+            <a:r>
+              <a:rPr lang="en-US" sz="800" dirty="0">
+                <a:solidFill>
+                  <a:srgbClr val="5B7BFF"/>
                 </a:solidFill>
                 <a:latin typeface="JetBrains Mono" pitchFamily="34" charset="0"/>
                 <a:ea typeface="JetBrains Mono" pitchFamily="34" charset="-122"/>
                 <a:cs typeface="JetBrains Mono" pitchFamily="34" charset="-120"/>
               </a:rPr>
-              <a:t>A  AVAILABLE NOW</a:t>
-            </a:r>
-            <a:endParaRPr lang="en-US" sz="900" dirty="0"/>
+              <a:t>01</a:t>
+            </a:r>
+            <a:endParaRPr lang="en-US" sz="800" dirty="0"/>
           </a:p>
         </p:txBody>
       </p:sp>
@@ -2636,90 +2664,154 @@
         </p:nvSpPr>
         <p:spPr>
           <a:xfrm>
-            <a:off x="658368" y="2093976"/>
-            <a:ext cx="4389120" cy="402336"/>
-          </a:xfrm>
-          <a:prstGeom prst="rect">
-            <a:avLst/>
-          </a:prstGeom>
-          <a:noFill/>
-          <a:ln/>
-        </p:spPr>
-        <p:txBody>
-          <a:bodyPr wrap="square" lIns="0" tIns="0" rIns="0" bIns="0" rtlCol="0" anchor="ctr">
-            <a:normAutofit/>
-          </a:bodyPr>
-          <a:lstStyle/>
-          <a:p>
-            <a:pPr algn="l" indent="0" marL="0">
-              <a:buNone/>
-            </a:pPr>
-            <a:r>
-              <a:rPr lang="en-US" sz="2300" dirty="0">
-                <a:solidFill>
-                  <a:srgbClr val="0A0A0A"/>
+            <a:off x="1005840" y="2075688"/>
+            <a:ext cx="3886200" cy="292608"/>
+          </a:xfrm>
+          <a:prstGeom prst="rect">
+            <a:avLst/>
+          </a:prstGeom>
+          <a:noFill/>
+          <a:ln/>
+        </p:spPr>
+        <p:txBody>
+          <a:bodyPr wrap="square" lIns="0" tIns="0" rIns="0" bIns="0" rtlCol="0" anchor="ctr">
+            <a:normAutofit/>
+          </a:bodyPr>
+          <a:lstStyle/>
+          <a:p>
+            <a:pPr algn="l" indent="0" marL="0">
+              <a:buNone/>
+            </a:pPr>
+            <a:r>
+              <a:rPr lang="en-US" sz="1250" dirty="0">
+                <a:solidFill>
+                  <a:srgbClr val="FAFAF8"/>
                 </a:solidFill>
                 <a:latin typeface="PingFang SC" pitchFamily="34" charset="0"/>
                 <a:ea typeface="PingFang SC" pitchFamily="34" charset="-122"/>
                 <a:cs typeface="PingFang SC" pitchFamily="34" charset="-120"/>
               </a:rPr>
-              <a:t>工程骨架</a:t>
-            </a:r>
-            <a:endParaRPr lang="en-US" sz="2300" dirty="0"/>
-          </a:p>
-        </p:txBody>
-      </p:sp>
-      <p:sp>
-        <p:nvSpPr>
-          <p:cNvPr id="9" name="Text 7"/>
-          <p:cNvSpPr txBox="1"/>
-          <p:nvPr/>
-        </p:nvSpPr>
-        <p:spPr>
-          <a:xfrm>
-            <a:off x="658368" y="2551176"/>
-            <a:ext cx="4663440" cy="566928"/>
-          </a:xfrm>
-          <a:prstGeom prst="rect">
-            <a:avLst/>
-          </a:prstGeom>
-          <a:noFill/>
-          <a:ln/>
-        </p:spPr>
-        <p:txBody>
-          <a:bodyPr wrap="square" lIns="0" tIns="0" rIns="0" bIns="0" rtlCol="0" anchor="ctr">
-            <a:normAutofit/>
-          </a:bodyPr>
-          <a:lstStyle/>
-          <a:p>
-            <a:pPr algn="l" indent="0" marL="0">
-              <a:buNone/>
-            </a:pPr>
-            <a:r>
-              <a:rPr lang="en-US" sz="1300" dirty="0">
-                <a:solidFill>
-                  <a:srgbClr val="0A0A0A"/>
+              <a:t>用户以自然语言提出问题</a:t>
+            </a:r>
+            <a:endParaRPr lang="en-US" sz="1250" dirty="0"/>
+          </a:p>
+        </p:txBody>
+      </p:sp>
+      <p:sp>
+        <p:nvSpPr>
+          <p:cNvPr id="9" name="Shape 7"/>
+          <p:cNvSpPr/>
+          <p:nvPr/>
+        </p:nvSpPr>
+        <p:spPr>
+          <a:xfrm>
+            <a:off x="612648" y="2862072"/>
+            <a:ext cx="4297680" cy="0"/>
+          </a:xfrm>
+          <a:prstGeom prst="line">
+            <a:avLst/>
+          </a:prstGeom>
+          <a:noFill/>
+          <a:ln w="8890">
+            <a:solidFill>
+              <a:srgbClr val="363636"/>
+            </a:solidFill>
+            <a:prstDash val="solid"/>
+          </a:ln>
+        </p:spPr>
+      </p:sp>
+      <p:sp>
+        <p:nvSpPr>
+          <p:cNvPr id="10" name="Text 8"/>
+          <p:cNvSpPr txBox="1"/>
+          <p:nvPr/>
+        </p:nvSpPr>
+        <p:spPr>
+          <a:xfrm>
+            <a:off x="612648" y="3154680"/>
+            <a:ext cx="347472" cy="201168"/>
+          </a:xfrm>
+          <a:prstGeom prst="rect">
+            <a:avLst/>
+          </a:prstGeom>
+          <a:noFill/>
+          <a:ln/>
+        </p:spPr>
+        <p:txBody>
+          <a:bodyPr wrap="square" lIns="0" tIns="0" rIns="0" bIns="0" rtlCol="0" anchor="ctr">
+            <a:normAutofit/>
+          </a:bodyPr>
+          <a:lstStyle/>
+          <a:p>
+            <a:pPr algn="l" indent="0" marL="0">
+              <a:buNone/>
+            </a:pPr>
+            <a:r>
+              <a:rPr lang="en-US" sz="800" dirty="0">
+                <a:solidFill>
+                  <a:srgbClr val="5B7BFF"/>
+                </a:solidFill>
+                <a:latin typeface="JetBrains Mono" pitchFamily="34" charset="0"/>
+                <a:ea typeface="JetBrains Mono" pitchFamily="34" charset="-122"/>
+                <a:cs typeface="JetBrains Mono" pitchFamily="34" charset="-120"/>
+              </a:rPr>
+              <a:t>02</a:t>
+            </a:r>
+            <a:endParaRPr lang="en-US" sz="800" dirty="0"/>
+          </a:p>
+        </p:txBody>
+      </p:sp>
+      <p:sp>
+        <p:nvSpPr>
+          <p:cNvPr id="11" name="Text 9"/>
+          <p:cNvSpPr txBox="1"/>
+          <p:nvPr/>
+        </p:nvSpPr>
+        <p:spPr>
+          <a:xfrm>
+            <a:off x="1005840" y="3108960"/>
+            <a:ext cx="3886200" cy="292608"/>
+          </a:xfrm>
+          <a:prstGeom prst="rect">
+            <a:avLst/>
+          </a:prstGeom>
+          <a:noFill/>
+          <a:ln/>
+        </p:spPr>
+        <p:txBody>
+          <a:bodyPr wrap="square" lIns="0" tIns="0" rIns="0" bIns="0" rtlCol="0" anchor="ctr">
+            <a:normAutofit/>
+          </a:bodyPr>
+          <a:lstStyle/>
+          <a:p>
+            <a:pPr algn="l" indent="0" marL="0">
+              <a:buNone/>
+            </a:pPr>
+            <a:r>
+              <a:rPr lang="en-US" sz="1250" dirty="0">
+                <a:solidFill>
+                  <a:srgbClr val="FAFAF8"/>
                 </a:solidFill>
                 <a:latin typeface="PingFang SC" pitchFamily="34" charset="0"/>
                 <a:ea typeface="PingFang SC" pitchFamily="34" charset="-122"/>
                 <a:cs typeface="PingFang SC" pitchFamily="34" charset="-120"/>
               </a:rPr>
-              <a:t>协议、Schema、模拟器、Home Assistant 配置样例、部署说明与基础检查已经形成。</a:t>
-            </a:r>
-            <a:endParaRPr lang="en-US" sz="1300" dirty="0"/>
-          </a:p>
-        </p:txBody>
-      </p:sp>
-      <p:sp>
-        <p:nvSpPr>
-          <p:cNvPr id="10" name="Shape 8"/>
+              <a:t>Agent 从 HA 读取当前状态</a:t>
+            </a:r>
+            <a:endParaRPr lang="en-US" sz="1250" dirty="0"/>
+          </a:p>
+        </p:txBody>
+      </p:sp>
+      <p:sp>
+        <p:nvSpPr>
+          <p:cNvPr id="12" name="Shape 10"/>
           <p:cNvSpPr/>
           <p:nvPr/>
         </p:nvSpPr>
         <p:spPr>
           <a:xfrm>
-            <a:off x="658368" y="5285232"/>
-            <a:ext cx="4937760" cy="0"/>
+            <a:off x="612648" y="3895344"/>
+            <a:ext cx="4297680" cy="0"/>
           </a:xfrm>
           <a:prstGeom prst="line">
             <a:avLst/>
@@ -2727,7 +2819,7 @@
           <a:noFill/>
           <a:ln w="8890">
             <a:solidFill>
-              <a:srgbClr val="D4D4D2"/>
+              <a:srgbClr val="363636"/>
             </a:solidFill>
             <a:prstDash val="solid"/>
           </a:ln>
@@ -2735,687 +2827,592 @@
       </p:sp>
       <p:sp>
         <p:nvSpPr>
-          <p:cNvPr id="11" name="Text 9"/>
-          <p:cNvSpPr txBox="1"/>
-          <p:nvPr/>
-        </p:nvSpPr>
-        <p:spPr>
-          <a:xfrm>
-            <a:off x="658368" y="5449824"/>
-            <a:ext cx="201168" cy="201168"/>
-          </a:xfrm>
-          <a:prstGeom prst="rect">
-            <a:avLst/>
-          </a:prstGeom>
-          <a:noFill/>
-          <a:ln/>
-        </p:spPr>
-        <p:txBody>
-          <a:bodyPr wrap="square" lIns="0" tIns="0" rIns="0" bIns="0" rtlCol="0" anchor="ctr">
-            <a:normAutofit/>
-          </a:bodyPr>
-          <a:lstStyle/>
-          <a:p>
-            <a:pPr algn="l" indent="0" marL="0">
-              <a:buNone/>
-            </a:pPr>
-            <a:r>
-              <a:rPr lang="en-US" sz="900" dirty="0">
-                <a:solidFill>
-                  <a:srgbClr val="737373"/>
+          <p:cNvPr id="13" name="Text 11"/>
+          <p:cNvSpPr txBox="1"/>
+          <p:nvPr/>
+        </p:nvSpPr>
+        <p:spPr>
+          <a:xfrm>
+            <a:off x="612648" y="4187952"/>
+            <a:ext cx="347472" cy="201168"/>
+          </a:xfrm>
+          <a:prstGeom prst="rect">
+            <a:avLst/>
+          </a:prstGeom>
+          <a:noFill/>
+          <a:ln/>
+        </p:spPr>
+        <p:txBody>
+          <a:bodyPr wrap="square" lIns="0" tIns="0" rIns="0" bIns="0" rtlCol="0" anchor="ctr">
+            <a:normAutofit/>
+          </a:bodyPr>
+          <a:lstStyle/>
+          <a:p>
+            <a:pPr algn="l" indent="0" marL="0">
+              <a:buNone/>
+            </a:pPr>
+            <a:r>
+              <a:rPr lang="en-US" sz="800" dirty="0">
+                <a:solidFill>
+                  <a:srgbClr val="5B7BFF"/>
                 </a:solidFill>
                 <a:latin typeface="JetBrains Mono" pitchFamily="34" charset="0"/>
                 <a:ea typeface="JetBrains Mono" pitchFamily="34" charset="-122"/>
                 <a:cs typeface="JetBrains Mono" pitchFamily="34" charset="-120"/>
               </a:rPr>
-              <a:t>—</a:t>
-            </a:r>
-            <a:endParaRPr lang="en-US" sz="900" dirty="0"/>
-          </a:p>
-        </p:txBody>
-      </p:sp>
-      <p:sp>
-        <p:nvSpPr>
-          <p:cNvPr id="12" name="Text 10"/>
-          <p:cNvSpPr txBox="1"/>
-          <p:nvPr/>
-        </p:nvSpPr>
-        <p:spPr>
-          <a:xfrm>
-            <a:off x="905256" y="5449824"/>
-            <a:ext cx="4416552" cy="219456"/>
-          </a:xfrm>
-          <a:prstGeom prst="rect">
-            <a:avLst/>
-          </a:prstGeom>
-          <a:noFill/>
-          <a:ln/>
-        </p:spPr>
-        <p:txBody>
-          <a:bodyPr wrap="square" lIns="0" tIns="0" rIns="0" bIns="0" rtlCol="0" anchor="ctr">
-            <a:normAutofit/>
-          </a:bodyPr>
-          <a:lstStyle/>
-          <a:p>
-            <a:pPr algn="l" indent="0" marL="0">
-              <a:buNone/>
-            </a:pPr>
-            <a:r>
-              <a:rPr lang="en-US" sz="1100" dirty="0">
-                <a:solidFill>
-                  <a:srgbClr val="0A0A0A"/>
+              <a:t>03</a:t>
+            </a:r>
+            <a:endParaRPr lang="en-US" sz="800" dirty="0"/>
+          </a:p>
+        </p:txBody>
+      </p:sp>
+      <p:sp>
+        <p:nvSpPr>
+          <p:cNvPr id="14" name="Text 12"/>
+          <p:cNvSpPr txBox="1"/>
+          <p:nvPr/>
+        </p:nvSpPr>
+        <p:spPr>
+          <a:xfrm>
+            <a:off x="1005840" y="4142232"/>
+            <a:ext cx="3886200" cy="292608"/>
+          </a:xfrm>
+          <a:prstGeom prst="rect">
+            <a:avLst/>
+          </a:prstGeom>
+          <a:noFill/>
+          <a:ln/>
+        </p:spPr>
+        <p:txBody>
+          <a:bodyPr wrap="square" lIns="0" tIns="0" rIns="0" bIns="0" rtlCol="0" anchor="ctr">
+            <a:normAutofit/>
+          </a:bodyPr>
+          <a:lstStyle/>
+          <a:p>
+            <a:pPr algn="l" indent="0" marL="0">
+              <a:buNone/>
+            </a:pPr>
+            <a:r>
+              <a:rPr lang="en-US" sz="1250" dirty="0">
+                <a:solidFill>
+                  <a:srgbClr val="FAFAF8"/>
                 </a:solidFill>
                 <a:latin typeface="PingFang SC" pitchFamily="34" charset="0"/>
                 <a:ea typeface="PingFang SC" pitchFamily="34" charset="-122"/>
                 <a:cs typeface="PingFang SC" pitchFamily="34" charset="-120"/>
               </a:rPr>
-              <a:t>UNO R4 WiFi 已确认</a:t>
-            </a:r>
-            <a:endParaRPr lang="en-US" sz="1100" dirty="0"/>
-          </a:p>
-        </p:txBody>
-      </p:sp>
-      <p:sp>
-        <p:nvSpPr>
-          <p:cNvPr id="13" name="Text 11"/>
-          <p:cNvSpPr txBox="1"/>
-          <p:nvPr/>
-        </p:nvSpPr>
-        <p:spPr>
-          <a:xfrm>
-            <a:off x="658368" y="5733288"/>
-            <a:ext cx="201168" cy="201168"/>
-          </a:xfrm>
-          <a:prstGeom prst="rect">
-            <a:avLst/>
-          </a:prstGeom>
-          <a:noFill/>
-          <a:ln/>
-        </p:spPr>
-        <p:txBody>
-          <a:bodyPr wrap="square" lIns="0" tIns="0" rIns="0" bIns="0" rtlCol="0" anchor="ctr">
-            <a:normAutofit/>
-          </a:bodyPr>
-          <a:lstStyle/>
-          <a:p>
-            <a:pPr algn="l" indent="0" marL="0">
-              <a:buNone/>
-            </a:pPr>
-            <a:r>
-              <a:rPr lang="en-US" sz="900" dirty="0">
-                <a:solidFill>
-                  <a:srgbClr val="737373"/>
+              <a:t>解释数据、时效与不确定性</a:t>
+            </a:r>
+            <a:endParaRPr lang="en-US" sz="1250" dirty="0"/>
+          </a:p>
+        </p:txBody>
+      </p:sp>
+      <p:sp>
+        <p:nvSpPr>
+          <p:cNvPr id="15" name="Shape 13"/>
+          <p:cNvSpPr/>
+          <p:nvPr/>
+        </p:nvSpPr>
+        <p:spPr>
+          <a:xfrm>
+            <a:off x="612648" y="4928616"/>
+            <a:ext cx="4297680" cy="0"/>
+          </a:xfrm>
+          <a:prstGeom prst="line">
+            <a:avLst/>
+          </a:prstGeom>
+          <a:noFill/>
+          <a:ln w="8890">
+            <a:solidFill>
+              <a:srgbClr val="363636"/>
+            </a:solidFill>
+            <a:prstDash val="solid"/>
+          </a:ln>
+        </p:spPr>
+      </p:sp>
+      <p:sp>
+        <p:nvSpPr>
+          <p:cNvPr id="16" name="Text 14"/>
+          <p:cNvSpPr txBox="1"/>
+          <p:nvPr/>
+        </p:nvSpPr>
+        <p:spPr>
+          <a:xfrm>
+            <a:off x="612648" y="5221224"/>
+            <a:ext cx="347472" cy="201168"/>
+          </a:xfrm>
+          <a:prstGeom prst="rect">
+            <a:avLst/>
+          </a:prstGeom>
+          <a:noFill/>
+          <a:ln/>
+        </p:spPr>
+        <p:txBody>
+          <a:bodyPr wrap="square" lIns="0" tIns="0" rIns="0" bIns="0" rtlCol="0" anchor="ctr">
+            <a:normAutofit/>
+          </a:bodyPr>
+          <a:lstStyle/>
+          <a:p>
+            <a:pPr algn="l" indent="0" marL="0">
+              <a:buNone/>
+            </a:pPr>
+            <a:r>
+              <a:rPr lang="en-US" sz="800" dirty="0">
+                <a:solidFill>
+                  <a:srgbClr val="5B7BFF"/>
                 </a:solidFill>
                 <a:latin typeface="JetBrains Mono" pitchFamily="34" charset="0"/>
                 <a:ea typeface="JetBrains Mono" pitchFamily="34" charset="-122"/>
                 <a:cs typeface="JetBrains Mono" pitchFamily="34" charset="-120"/>
               </a:rPr>
-              <a:t>—</a:t>
-            </a:r>
-            <a:endParaRPr lang="en-US" sz="900" dirty="0"/>
-          </a:p>
-        </p:txBody>
-      </p:sp>
-      <p:sp>
-        <p:nvSpPr>
-          <p:cNvPr id="14" name="Text 12"/>
-          <p:cNvSpPr txBox="1"/>
-          <p:nvPr/>
-        </p:nvSpPr>
-        <p:spPr>
-          <a:xfrm>
-            <a:off x="905256" y="5733288"/>
-            <a:ext cx="4416552" cy="219456"/>
-          </a:xfrm>
-          <a:prstGeom prst="rect">
-            <a:avLst/>
-          </a:prstGeom>
-          <a:noFill/>
-          <a:ln/>
-        </p:spPr>
-        <p:txBody>
-          <a:bodyPr wrap="square" lIns="0" tIns="0" rIns="0" bIns="0" rtlCol="0" anchor="ctr">
-            <a:normAutofit/>
-          </a:bodyPr>
-          <a:lstStyle/>
-          <a:p>
-            <a:pPr algn="l" indent="0" marL="0">
-              <a:buNone/>
-            </a:pPr>
-            <a:r>
-              <a:rPr lang="en-US" sz="1100" dirty="0">
-                <a:solidFill>
-                  <a:srgbClr val="0A0A0A"/>
+              <a:t>04</a:t>
+            </a:r>
+            <a:endParaRPr lang="en-US" sz="800" dirty="0"/>
+          </a:p>
+        </p:txBody>
+      </p:sp>
+      <p:sp>
+        <p:nvSpPr>
+          <p:cNvPr id="17" name="Text 15"/>
+          <p:cNvSpPr txBox="1"/>
+          <p:nvPr/>
+        </p:nvSpPr>
+        <p:spPr>
+          <a:xfrm>
+            <a:off x="1005840" y="5175504"/>
+            <a:ext cx="3886200" cy="292608"/>
+          </a:xfrm>
+          <a:prstGeom prst="rect">
+            <a:avLst/>
+          </a:prstGeom>
+          <a:noFill/>
+          <a:ln/>
+        </p:spPr>
+        <p:txBody>
+          <a:bodyPr wrap="square" lIns="0" tIns="0" rIns="0" bIns="0" rtlCol="0" anchor="ctr">
+            <a:normAutofit/>
+          </a:bodyPr>
+          <a:lstStyle/>
+          <a:p>
+            <a:pPr algn="l" indent="0" marL="0">
+              <a:buNone/>
+            </a:pPr>
+            <a:r>
+              <a:rPr lang="en-US" sz="1250" dirty="0">
+                <a:solidFill>
+                  <a:srgbClr val="FAFAF8"/>
                 </a:solidFill>
                 <a:latin typeface="PingFang SC" pitchFamily="34" charset="0"/>
                 <a:ea typeface="PingFang SC" pitchFamily="34" charset="-122"/>
                 <a:cs typeface="PingFang SC" pitchFamily="34" charset="-120"/>
               </a:rPr>
-              <a:t>模拟数据显式标记 simulated=true</a:t>
-            </a:r>
-            <a:endParaRPr lang="en-US" sz="1100" dirty="0"/>
-          </a:p>
-        </p:txBody>
-      </p:sp>
-      <p:sp>
-        <p:nvSpPr>
-          <p:cNvPr id="15" name="Text 13"/>
-          <p:cNvSpPr txBox="1"/>
-          <p:nvPr/>
-        </p:nvSpPr>
-        <p:spPr>
-          <a:xfrm>
-            <a:off x="658368" y="6016752"/>
-            <a:ext cx="201168" cy="201168"/>
-          </a:xfrm>
-          <a:prstGeom prst="rect">
-            <a:avLst/>
-          </a:prstGeom>
-          <a:noFill/>
-          <a:ln/>
-        </p:spPr>
-        <p:txBody>
-          <a:bodyPr wrap="square" lIns="0" tIns="0" rIns="0" bIns="0" rtlCol="0" anchor="ctr">
-            <a:normAutofit/>
-          </a:bodyPr>
-          <a:lstStyle/>
-          <a:p>
-            <a:pPr algn="l" indent="0" marL="0">
-              <a:buNone/>
-            </a:pPr>
-            <a:r>
-              <a:rPr lang="en-US" sz="900" dirty="0">
-                <a:solidFill>
-                  <a:srgbClr val="737373"/>
+              <a:t>未来经确认后调用低风险场景</a:t>
+            </a:r>
+            <a:endParaRPr lang="en-US" sz="1250" dirty="0"/>
+          </a:p>
+        </p:txBody>
+      </p:sp>
+      <p:sp>
+        <p:nvSpPr>
+          <p:cNvPr id="18" name="Shape 16"/>
+          <p:cNvSpPr/>
+          <p:nvPr/>
+        </p:nvSpPr>
+        <p:spPr>
+          <a:xfrm>
+            <a:off x="612648" y="5961888"/>
+            <a:ext cx="4297680" cy="0"/>
+          </a:xfrm>
+          <a:prstGeom prst="line">
+            <a:avLst/>
+          </a:prstGeom>
+          <a:noFill/>
+          <a:ln w="8890">
+            <a:solidFill>
+              <a:srgbClr val="363636"/>
+            </a:solidFill>
+            <a:prstDash val="solid"/>
+          </a:ln>
+        </p:spPr>
+      </p:sp>
+      <p:sp>
+        <p:nvSpPr>
+          <p:cNvPr id="19" name="Shape 17"/>
+          <p:cNvSpPr/>
+          <p:nvPr/>
+        </p:nvSpPr>
+        <p:spPr>
+          <a:xfrm>
+            <a:off x="6876288" y="2212848"/>
+            <a:ext cx="3246120" cy="3246120"/>
+          </a:xfrm>
+          <a:prstGeom prst="ellipse">
+            <a:avLst/>
+          </a:prstGeom>
+          <a:solidFill>
+            <a:srgbClr val="0A0A0A">
+              <a:alpha val="0"/>
+            </a:srgbClr>
+          </a:solidFill>
+          <a:ln w="16510">
+            <a:solidFill>
+              <a:srgbClr val="5B7BFF"/>
+            </a:solidFill>
+            <a:prstDash val="solid"/>
+          </a:ln>
+        </p:spPr>
+      </p:sp>
+      <p:sp>
+        <p:nvSpPr>
+          <p:cNvPr id="20" name="Text 18"/>
+          <p:cNvSpPr txBox="1"/>
+          <p:nvPr/>
+        </p:nvSpPr>
+        <p:spPr>
+          <a:xfrm>
+            <a:off x="7909560" y="1828800"/>
+            <a:ext cx="1097280" cy="182880"/>
+          </a:xfrm>
+          <a:prstGeom prst="rect">
+            <a:avLst/>
+          </a:prstGeom>
+          <a:noFill/>
+          <a:ln/>
+        </p:spPr>
+        <p:txBody>
+          <a:bodyPr wrap="square" lIns="0" tIns="0" rIns="0" bIns="0" rtlCol="0" anchor="ctr">
+            <a:normAutofit/>
+          </a:bodyPr>
+          <a:lstStyle/>
+          <a:p>
+            <a:pPr algn="ctr" indent="0" marL="0">
+              <a:buNone/>
+            </a:pPr>
+            <a:r>
+              <a:rPr lang="en-US" sz="800" spc="150" kern="0" dirty="0">
+                <a:solidFill>
+                  <a:srgbClr val="FAFAF8"/>
                 </a:solidFill>
                 <a:latin typeface="JetBrains Mono" pitchFamily="34" charset="0"/>
                 <a:ea typeface="JetBrains Mono" pitchFamily="34" charset="-122"/>
                 <a:cs typeface="JetBrains Mono" pitchFamily="34" charset="-120"/>
               </a:rPr>
-              <a:t>—</a:t>
-            </a:r>
-            <a:endParaRPr lang="en-US" sz="900" dirty="0"/>
-          </a:p>
-        </p:txBody>
-      </p:sp>
-      <p:sp>
-        <p:nvSpPr>
-          <p:cNvPr id="16" name="Text 14"/>
-          <p:cNvSpPr txBox="1"/>
-          <p:nvPr/>
-        </p:nvSpPr>
-        <p:spPr>
-          <a:xfrm>
-            <a:off x="905256" y="6016752"/>
-            <a:ext cx="4416552" cy="219456"/>
-          </a:xfrm>
-          <a:prstGeom prst="rect">
-            <a:avLst/>
-          </a:prstGeom>
-          <a:noFill/>
-          <a:ln/>
-        </p:spPr>
-        <p:txBody>
-          <a:bodyPr wrap="square" lIns="0" tIns="0" rIns="0" bIns="0" rtlCol="0" anchor="ctr">
-            <a:normAutofit/>
-          </a:bodyPr>
-          <a:lstStyle/>
-          <a:p>
-            <a:pPr algn="l" indent="0" marL="0">
-              <a:buNone/>
-            </a:pPr>
-            <a:r>
-              <a:rPr lang="en-US" sz="1100" dirty="0">
-                <a:solidFill>
-                  <a:srgbClr val="0A0A0A"/>
+              <a:t>ASK</a:t>
+            </a:r>
+            <a:endParaRPr lang="en-US" sz="800" dirty="0"/>
+          </a:p>
+        </p:txBody>
+      </p:sp>
+      <p:sp>
+        <p:nvSpPr>
+          <p:cNvPr id="21" name="Text 19"/>
+          <p:cNvSpPr txBox="1"/>
+          <p:nvPr/>
+        </p:nvSpPr>
+        <p:spPr>
+          <a:xfrm>
+            <a:off x="10332720" y="3749040"/>
+            <a:ext cx="1097280" cy="182880"/>
+          </a:xfrm>
+          <a:prstGeom prst="rect">
+            <a:avLst/>
+          </a:prstGeom>
+          <a:noFill/>
+          <a:ln/>
+        </p:spPr>
+        <p:txBody>
+          <a:bodyPr wrap="square" lIns="0" tIns="0" rIns="0" bIns="0" rtlCol="0" anchor="ctr">
+            <a:normAutofit/>
+          </a:bodyPr>
+          <a:lstStyle/>
+          <a:p>
+            <a:pPr algn="ctr" indent="0" marL="0">
+              <a:buNone/>
+            </a:pPr>
+            <a:r>
+              <a:rPr lang="en-US" sz="800" spc="150" kern="0" dirty="0">
+                <a:solidFill>
+                  <a:srgbClr val="FAFAF8"/>
+                </a:solidFill>
+                <a:latin typeface="JetBrains Mono" pitchFamily="34" charset="0"/>
+                <a:ea typeface="JetBrains Mono" pitchFamily="34" charset="-122"/>
+                <a:cs typeface="JetBrains Mono" pitchFamily="34" charset="-120"/>
+              </a:rPr>
+              <a:t>READ</a:t>
+            </a:r>
+            <a:endParaRPr lang="en-US" sz="800" dirty="0"/>
+          </a:p>
+        </p:txBody>
+      </p:sp>
+      <p:sp>
+        <p:nvSpPr>
+          <p:cNvPr id="22" name="Text 20"/>
+          <p:cNvSpPr txBox="1"/>
+          <p:nvPr/>
+        </p:nvSpPr>
+        <p:spPr>
+          <a:xfrm>
+            <a:off x="7818120" y="5650992"/>
+            <a:ext cx="1097280" cy="182880"/>
+          </a:xfrm>
+          <a:prstGeom prst="rect">
+            <a:avLst/>
+          </a:prstGeom>
+          <a:noFill/>
+          <a:ln/>
+        </p:spPr>
+        <p:txBody>
+          <a:bodyPr wrap="square" lIns="0" tIns="0" rIns="0" bIns="0" rtlCol="0" anchor="ctr">
+            <a:normAutofit/>
+          </a:bodyPr>
+          <a:lstStyle/>
+          <a:p>
+            <a:pPr algn="ctr" indent="0" marL="0">
+              <a:buNone/>
+            </a:pPr>
+            <a:r>
+              <a:rPr lang="en-US" sz="800" spc="150" kern="0" dirty="0">
+                <a:solidFill>
+                  <a:srgbClr val="FAFAF8"/>
+                </a:solidFill>
+                <a:latin typeface="JetBrains Mono" pitchFamily="34" charset="0"/>
+                <a:ea typeface="JetBrains Mono" pitchFamily="34" charset="-122"/>
+                <a:cs typeface="JetBrains Mono" pitchFamily="34" charset="-120"/>
+              </a:rPr>
+              <a:t>EXPLAIN</a:t>
+            </a:r>
+            <a:endParaRPr lang="en-US" sz="800" dirty="0"/>
+          </a:p>
+        </p:txBody>
+      </p:sp>
+      <p:sp>
+        <p:nvSpPr>
+          <p:cNvPr id="23" name="Text 21"/>
+          <p:cNvSpPr txBox="1"/>
+          <p:nvPr/>
+        </p:nvSpPr>
+        <p:spPr>
+          <a:xfrm>
+            <a:off x="5486400" y="3749040"/>
+            <a:ext cx="1097280" cy="182880"/>
+          </a:xfrm>
+          <a:prstGeom prst="rect">
+            <a:avLst/>
+          </a:prstGeom>
+          <a:noFill/>
+          <a:ln/>
+        </p:spPr>
+        <p:txBody>
+          <a:bodyPr wrap="square" lIns="0" tIns="0" rIns="0" bIns="0" rtlCol="0" anchor="ctr">
+            <a:normAutofit/>
+          </a:bodyPr>
+          <a:lstStyle/>
+          <a:p>
+            <a:pPr algn="ctr" indent="0" marL="0">
+              <a:buNone/>
+            </a:pPr>
+            <a:r>
+              <a:rPr lang="en-US" sz="800" spc="150" kern="0" dirty="0">
+                <a:solidFill>
+                  <a:srgbClr val="FAFAF8"/>
+                </a:solidFill>
+                <a:latin typeface="JetBrains Mono" pitchFamily="34" charset="0"/>
+                <a:ea typeface="JetBrains Mono" pitchFamily="34" charset="-122"/>
+                <a:cs typeface="JetBrains Mono" pitchFamily="34" charset="-120"/>
+              </a:rPr>
+              <a:t>CONFIRM</a:t>
+            </a:r>
+            <a:endParaRPr lang="en-US" sz="800" dirty="0"/>
+          </a:p>
+        </p:txBody>
+      </p:sp>
+      <p:sp>
+        <p:nvSpPr>
+          <p:cNvPr id="24" name="Shape 22"/>
+          <p:cNvSpPr/>
+          <p:nvPr/>
+        </p:nvSpPr>
+        <p:spPr>
+          <a:xfrm>
+            <a:off x="8439912" y="2130552"/>
+            <a:ext cx="128016" cy="128016"/>
+          </a:xfrm>
+          <a:prstGeom prst="ellipse">
+            <a:avLst/>
+          </a:prstGeom>
+          <a:solidFill>
+            <a:srgbClr val="5B7BFF"/>
+          </a:solidFill>
+          <a:ln w="12700">
+            <a:solidFill>
+              <a:srgbClr val="5B7BFF">
+                <a:alpha val="0"/>
+              </a:srgbClr>
+            </a:solidFill>
+            <a:prstDash val="solid"/>
+          </a:ln>
+        </p:spPr>
+      </p:sp>
+      <p:sp>
+        <p:nvSpPr>
+          <p:cNvPr id="25" name="Shape 23"/>
+          <p:cNvSpPr/>
+          <p:nvPr/>
+        </p:nvSpPr>
+        <p:spPr>
+          <a:xfrm>
+            <a:off x="10040112" y="3767328"/>
+            <a:ext cx="128016" cy="128016"/>
+          </a:xfrm>
+          <a:prstGeom prst="ellipse">
+            <a:avLst/>
+          </a:prstGeom>
+          <a:solidFill>
+            <a:srgbClr val="5B7BFF"/>
+          </a:solidFill>
+          <a:ln w="12700">
+            <a:solidFill>
+              <a:srgbClr val="5B7BFF">
+                <a:alpha val="0"/>
+              </a:srgbClr>
+            </a:solidFill>
+            <a:prstDash val="solid"/>
+          </a:ln>
+        </p:spPr>
+      </p:sp>
+      <p:sp>
+        <p:nvSpPr>
+          <p:cNvPr id="26" name="Shape 24"/>
+          <p:cNvSpPr/>
+          <p:nvPr/>
+        </p:nvSpPr>
+        <p:spPr>
+          <a:xfrm>
+            <a:off x="8439912" y="5376672"/>
+            <a:ext cx="128016" cy="128016"/>
+          </a:xfrm>
+          <a:prstGeom prst="ellipse">
+            <a:avLst/>
+          </a:prstGeom>
+          <a:solidFill>
+            <a:srgbClr val="5B7BFF"/>
+          </a:solidFill>
+          <a:ln w="12700">
+            <a:solidFill>
+              <a:srgbClr val="5B7BFF">
+                <a:alpha val="0"/>
+              </a:srgbClr>
+            </a:solidFill>
+            <a:prstDash val="solid"/>
+          </a:ln>
+        </p:spPr>
+      </p:sp>
+      <p:sp>
+        <p:nvSpPr>
+          <p:cNvPr id="27" name="Shape 25"/>
+          <p:cNvSpPr/>
+          <p:nvPr/>
+        </p:nvSpPr>
+        <p:spPr>
+          <a:xfrm>
+            <a:off x="6812280" y="3767328"/>
+            <a:ext cx="128016" cy="128016"/>
+          </a:xfrm>
+          <a:prstGeom prst="ellipse">
+            <a:avLst/>
+          </a:prstGeom>
+          <a:solidFill>
+            <a:srgbClr val="5B7BFF"/>
+          </a:solidFill>
+          <a:ln w="12700">
+            <a:solidFill>
+              <a:srgbClr val="5B7BFF">
+                <a:alpha val="0"/>
+              </a:srgbClr>
+            </a:solidFill>
+            <a:prstDash val="solid"/>
+          </a:ln>
+        </p:spPr>
+      </p:sp>
+      <p:sp>
+        <p:nvSpPr>
+          <p:cNvPr id="28" name="Text 26"/>
+          <p:cNvSpPr txBox="1"/>
+          <p:nvPr/>
+        </p:nvSpPr>
+        <p:spPr>
+          <a:xfrm>
+            <a:off x="7543800" y="3520440"/>
+            <a:ext cx="1920240" cy="457200"/>
+          </a:xfrm>
+          <a:prstGeom prst="rect">
+            <a:avLst/>
+          </a:prstGeom>
+          <a:noFill/>
+          <a:ln/>
+        </p:spPr>
+        <p:txBody>
+          <a:bodyPr wrap="square" lIns="0" tIns="0" rIns="0" bIns="0" rtlCol="0" anchor="ctr">
+            <a:normAutofit/>
+          </a:bodyPr>
+          <a:lstStyle/>
+          <a:p>
+            <a:pPr algn="ctr" indent="0" marL="0">
+              <a:buNone/>
+            </a:pPr>
+            <a:r>
+              <a:rPr lang="en-US" sz="3000" dirty="0">
+                <a:solidFill>
+                  <a:srgbClr val="FAFAF8"/>
                 </a:solidFill>
                 <a:latin typeface="PingFang SC" pitchFamily="34" charset="0"/>
                 <a:ea typeface="PingFang SC" pitchFamily="34" charset="-122"/>
                 <a:cs typeface="PingFang SC" pitchFamily="34" charset="-120"/>
               </a:rPr>
-              <a:t>架构与安全边界已有文档</a:t>
-            </a:r>
-            <a:endParaRPr lang="en-US" sz="1100" dirty="0"/>
-          </a:p>
-        </p:txBody>
-      </p:sp>
-      <p:sp>
-        <p:nvSpPr>
-          <p:cNvPr id="17" name="Text 15"/>
-          <p:cNvSpPr txBox="1"/>
-          <p:nvPr/>
-        </p:nvSpPr>
-        <p:spPr>
-          <a:xfrm>
-            <a:off x="6565392" y="1792224"/>
-            <a:ext cx="4389120" cy="228600"/>
-          </a:xfrm>
-          <a:prstGeom prst="rect">
-            <a:avLst/>
-          </a:prstGeom>
-          <a:noFill/>
-          <a:ln/>
-        </p:spPr>
-        <p:txBody>
-          <a:bodyPr wrap="square" lIns="0" tIns="0" rIns="0" bIns="0" rtlCol="0" anchor="ctr">
-            <a:normAutofit/>
-          </a:bodyPr>
-          <a:lstStyle/>
-          <a:p>
-            <a:pPr algn="l" indent="0" marL="0">
-              <a:buNone/>
-            </a:pPr>
-            <a:r>
-              <a:rPr lang="en-US" sz="900" spc="170" kern="0" dirty="0">
-                <a:solidFill>
-                  <a:srgbClr val="002FA7"/>
+              <a:t>LOOP</a:t>
+            </a:r>
+            <a:endParaRPr lang="en-US" sz="3000" dirty="0"/>
+          </a:p>
+        </p:txBody>
+      </p:sp>
+      <p:sp>
+        <p:nvSpPr>
+          <p:cNvPr id="29" name="Text 27"/>
+          <p:cNvSpPr txBox="1"/>
+          <p:nvPr/>
+        </p:nvSpPr>
+        <p:spPr>
+          <a:xfrm>
+            <a:off x="7178040" y="3986784"/>
+            <a:ext cx="2651760" cy="182880"/>
+          </a:xfrm>
+          <a:prstGeom prst="rect">
+            <a:avLst/>
+          </a:prstGeom>
+          <a:noFill/>
+          <a:ln/>
+        </p:spPr>
+        <p:txBody>
+          <a:bodyPr wrap="square" lIns="0" tIns="0" rIns="0" bIns="0" rtlCol="0" anchor="ctr">
+            <a:normAutofit/>
+          </a:bodyPr>
+          <a:lstStyle/>
+          <a:p>
+            <a:pPr algn="ctr" indent="0" marL="0">
+              <a:buNone/>
+            </a:pPr>
+            <a:r>
+              <a:rPr lang="en-US" sz="750" spc="110" kern="0" dirty="0">
+                <a:solidFill>
+                  <a:srgbClr val="B8B8B8"/>
                 </a:solidFill>
                 <a:latin typeface="JetBrains Mono" pitchFamily="34" charset="0"/>
                 <a:ea typeface="JetBrains Mono" pitchFamily="34" charset="-122"/>
                 <a:cs typeface="JetBrains Mono" pitchFamily="34" charset="-120"/>
               </a:rPr>
-              <a:t>B  NOT VERIFIED YET</a:t>
-            </a:r>
-            <a:endParaRPr lang="en-US" sz="900" dirty="0"/>
-          </a:p>
-        </p:txBody>
-      </p:sp>
-      <p:sp>
-        <p:nvSpPr>
-          <p:cNvPr id="18" name="Text 16"/>
-          <p:cNvSpPr txBox="1"/>
-          <p:nvPr/>
-        </p:nvSpPr>
-        <p:spPr>
-          <a:xfrm>
-            <a:off x="6565392" y="2093976"/>
-            <a:ext cx="4389120" cy="402336"/>
-          </a:xfrm>
-          <a:prstGeom prst="rect">
-            <a:avLst/>
-          </a:prstGeom>
-          <a:noFill/>
-          <a:ln/>
-        </p:spPr>
-        <p:txBody>
-          <a:bodyPr wrap="square" lIns="0" tIns="0" rIns="0" bIns="0" rtlCol="0" anchor="ctr">
-            <a:normAutofit/>
-          </a:bodyPr>
-          <a:lstStyle/>
-          <a:p>
-            <a:pPr algn="l" indent="0" marL="0">
-              <a:buNone/>
-            </a:pPr>
-            <a:r>
-              <a:rPr lang="en-US" sz="2300" dirty="0">
-                <a:solidFill>
-                  <a:srgbClr val="002FA7"/>
-                </a:solidFill>
-                <a:latin typeface="PingFang SC" pitchFamily="34" charset="0"/>
-                <a:ea typeface="PingFang SC" pitchFamily="34" charset="-122"/>
-                <a:cs typeface="PingFang SC" pitchFamily="34" charset="-120"/>
-              </a:rPr>
-              <a:t>真实验收</a:t>
-            </a:r>
-            <a:endParaRPr lang="en-US" sz="2300" dirty="0"/>
-          </a:p>
-        </p:txBody>
-      </p:sp>
-      <p:sp>
-        <p:nvSpPr>
-          <p:cNvPr id="19" name="Text 17"/>
-          <p:cNvSpPr txBox="1"/>
-          <p:nvPr/>
-        </p:nvSpPr>
-        <p:spPr>
-          <a:xfrm>
-            <a:off x="6565392" y="2551176"/>
-            <a:ext cx="4663440" cy="621792"/>
-          </a:xfrm>
-          <a:prstGeom prst="rect">
-            <a:avLst/>
-          </a:prstGeom>
-          <a:noFill/>
-          <a:ln/>
-        </p:spPr>
-        <p:txBody>
-          <a:bodyPr wrap="square" lIns="0" tIns="0" rIns="0" bIns="0" rtlCol="0" anchor="ctr">
-            <a:normAutofit/>
-          </a:bodyPr>
-          <a:lstStyle/>
-          <a:p>
-            <a:pPr algn="l" indent="0" marL="0">
-              <a:buNone/>
-            </a:pPr>
-            <a:r>
-              <a:rPr lang="en-US" sz="1300" dirty="0">
-                <a:solidFill>
-                  <a:srgbClr val="0A0A0A"/>
-                </a:solidFill>
-                <a:latin typeface="PingFang SC" pitchFamily="34" charset="0"/>
-                <a:ea typeface="PingFang SC" pitchFamily="34" charset="-122"/>
-                <a:cs typeface="PingFang SC" pitchFamily="34" charset="-120"/>
-              </a:rPr>
-              <a:t>传感器型号、真实采样、MQTT/HA/Hermes 联调、设备控制与完整无线节点仍待现场验证。</a:t>
-            </a:r>
-            <a:endParaRPr lang="en-US" sz="1300" dirty="0"/>
-          </a:p>
-        </p:txBody>
-      </p:sp>
-      <p:sp>
-        <p:nvSpPr>
-          <p:cNvPr id="20" name="Shape 18"/>
-          <p:cNvSpPr/>
-          <p:nvPr/>
-        </p:nvSpPr>
-        <p:spPr>
-          <a:xfrm>
-            <a:off x="6565392" y="5285232"/>
-            <a:ext cx="4937760" cy="0"/>
-          </a:xfrm>
-          <a:prstGeom prst="line">
-            <a:avLst/>
-          </a:prstGeom>
-          <a:noFill/>
-          <a:ln w="8890">
-            <a:solidFill>
-              <a:srgbClr val="D4D4D2"/>
-            </a:solidFill>
-            <a:prstDash val="solid"/>
-          </a:ln>
-        </p:spPr>
-      </p:sp>
-      <p:sp>
-        <p:nvSpPr>
-          <p:cNvPr id="21" name="Text 19"/>
-          <p:cNvSpPr txBox="1"/>
-          <p:nvPr/>
-        </p:nvSpPr>
-        <p:spPr>
-          <a:xfrm>
-            <a:off x="6565392" y="5449824"/>
-            <a:ext cx="201168" cy="201168"/>
-          </a:xfrm>
-          <a:prstGeom prst="rect">
-            <a:avLst/>
-          </a:prstGeom>
-          <a:noFill/>
-          <a:ln/>
-        </p:spPr>
-        <p:txBody>
-          <a:bodyPr wrap="square" lIns="0" tIns="0" rIns="0" bIns="0" rtlCol="0" anchor="ctr">
-            <a:normAutofit/>
-          </a:bodyPr>
-          <a:lstStyle/>
-          <a:p>
-            <a:pPr algn="l" indent="0" marL="0">
-              <a:buNone/>
-            </a:pPr>
-            <a:r>
-              <a:rPr lang="en-US" sz="900" dirty="0">
-                <a:solidFill>
-                  <a:srgbClr val="002FA7"/>
-                </a:solidFill>
-                <a:latin typeface="JetBrains Mono" pitchFamily="34" charset="0"/>
-                <a:ea typeface="JetBrains Mono" pitchFamily="34" charset="-122"/>
-                <a:cs typeface="JetBrains Mono" pitchFamily="34" charset="-120"/>
-              </a:rPr>
-              <a:t>—</a:t>
-            </a:r>
-            <a:endParaRPr lang="en-US" sz="900" dirty="0"/>
-          </a:p>
-        </p:txBody>
-      </p:sp>
-      <p:sp>
-        <p:nvSpPr>
-          <p:cNvPr id="22" name="Text 20"/>
-          <p:cNvSpPr txBox="1"/>
-          <p:nvPr/>
-        </p:nvSpPr>
-        <p:spPr>
-          <a:xfrm>
-            <a:off x="6812280" y="5449824"/>
-            <a:ext cx="4416552" cy="219456"/>
-          </a:xfrm>
-          <a:prstGeom prst="rect">
-            <a:avLst/>
-          </a:prstGeom>
-          <a:noFill/>
-          <a:ln/>
-        </p:spPr>
-        <p:txBody>
-          <a:bodyPr wrap="square" lIns="0" tIns="0" rIns="0" bIns="0" rtlCol="0" anchor="ctr">
-            <a:normAutofit/>
-          </a:bodyPr>
-          <a:lstStyle/>
-          <a:p>
-            <a:pPr algn="l" indent="0" marL="0">
-              <a:buNone/>
-            </a:pPr>
-            <a:r>
-              <a:rPr lang="en-US" sz="1100" dirty="0">
-                <a:solidFill>
-                  <a:srgbClr val="0A0A0A"/>
-                </a:solidFill>
-                <a:latin typeface="PingFang SC" pitchFamily="34" charset="0"/>
-                <a:ea typeface="PingFang SC" pitchFamily="34" charset="-122"/>
-                <a:cs typeface="PingFang SC" pitchFamily="34" charset="-120"/>
-              </a:rPr>
-              <a:t>不虚构硬件测试结果</a:t>
-            </a:r>
-            <a:endParaRPr lang="en-US" sz="1100" dirty="0"/>
-          </a:p>
-        </p:txBody>
-      </p:sp>
-      <p:sp>
-        <p:nvSpPr>
-          <p:cNvPr id="23" name="Text 21"/>
-          <p:cNvSpPr txBox="1"/>
-          <p:nvPr/>
-        </p:nvSpPr>
-        <p:spPr>
-          <a:xfrm>
-            <a:off x="6565392" y="5733288"/>
-            <a:ext cx="201168" cy="201168"/>
-          </a:xfrm>
-          <a:prstGeom prst="rect">
-            <a:avLst/>
-          </a:prstGeom>
-          <a:noFill/>
-          <a:ln/>
-        </p:spPr>
-        <p:txBody>
-          <a:bodyPr wrap="square" lIns="0" tIns="0" rIns="0" bIns="0" rtlCol="0" anchor="ctr">
-            <a:normAutofit/>
-          </a:bodyPr>
-          <a:lstStyle/>
-          <a:p>
-            <a:pPr algn="l" indent="0" marL="0">
-              <a:buNone/>
-            </a:pPr>
-            <a:r>
-              <a:rPr lang="en-US" sz="900" dirty="0">
-                <a:solidFill>
-                  <a:srgbClr val="002FA7"/>
-                </a:solidFill>
-                <a:latin typeface="JetBrains Mono" pitchFamily="34" charset="0"/>
-                <a:ea typeface="JetBrains Mono" pitchFamily="34" charset="-122"/>
-                <a:cs typeface="JetBrains Mono" pitchFamily="34" charset="-120"/>
-              </a:rPr>
-              <a:t>—</a:t>
-            </a:r>
-            <a:endParaRPr lang="en-US" sz="900" dirty="0"/>
-          </a:p>
-        </p:txBody>
-      </p:sp>
-      <p:sp>
-        <p:nvSpPr>
-          <p:cNvPr id="24" name="Text 22"/>
-          <p:cNvSpPr txBox="1"/>
-          <p:nvPr/>
-        </p:nvSpPr>
-        <p:spPr>
-          <a:xfrm>
-            <a:off x="6812280" y="5733288"/>
-            <a:ext cx="4416552" cy="219456"/>
-          </a:xfrm>
-          <a:prstGeom prst="rect">
-            <a:avLst/>
-          </a:prstGeom>
-          <a:noFill/>
-          <a:ln/>
-        </p:spPr>
-        <p:txBody>
-          <a:bodyPr wrap="square" lIns="0" tIns="0" rIns="0" bIns="0" rtlCol="0" anchor="ctr">
-            <a:normAutofit/>
-          </a:bodyPr>
-          <a:lstStyle/>
-          <a:p>
-            <a:pPr algn="l" indent="0" marL="0">
-              <a:buNone/>
-            </a:pPr>
-            <a:r>
-              <a:rPr lang="en-US" sz="1100" dirty="0">
-                <a:solidFill>
-                  <a:srgbClr val="0A0A0A"/>
-                </a:solidFill>
-                <a:latin typeface="PingFang SC" pitchFamily="34" charset="0"/>
-                <a:ea typeface="PingFang SC" pitchFamily="34" charset="-122"/>
-                <a:cs typeface="PingFang SC" pitchFamily="34" charset="-120"/>
-              </a:rPr>
-              <a:t>不把静态配置说成已部署</a:t>
-            </a:r>
-            <a:endParaRPr lang="en-US" sz="1100" dirty="0"/>
-          </a:p>
-        </p:txBody>
-      </p:sp>
-      <p:sp>
-        <p:nvSpPr>
-          <p:cNvPr id="25" name="Text 23"/>
-          <p:cNvSpPr txBox="1"/>
-          <p:nvPr/>
-        </p:nvSpPr>
-        <p:spPr>
-          <a:xfrm>
-            <a:off x="6565392" y="6016752"/>
-            <a:ext cx="201168" cy="201168"/>
-          </a:xfrm>
-          <a:prstGeom prst="rect">
-            <a:avLst/>
-          </a:prstGeom>
-          <a:noFill/>
-          <a:ln/>
-        </p:spPr>
-        <p:txBody>
-          <a:bodyPr wrap="square" lIns="0" tIns="0" rIns="0" bIns="0" rtlCol="0" anchor="ctr">
-            <a:normAutofit/>
-          </a:bodyPr>
-          <a:lstStyle/>
-          <a:p>
-            <a:pPr algn="l" indent="0" marL="0">
-              <a:buNone/>
-            </a:pPr>
-            <a:r>
-              <a:rPr lang="en-US" sz="900" dirty="0">
-                <a:solidFill>
-                  <a:srgbClr val="002FA7"/>
-                </a:solidFill>
-                <a:latin typeface="JetBrains Mono" pitchFamily="34" charset="0"/>
-                <a:ea typeface="JetBrains Mono" pitchFamily="34" charset="-122"/>
-                <a:cs typeface="JetBrains Mono" pitchFamily="34" charset="-120"/>
-              </a:rPr>
-              <a:t>—</a:t>
-            </a:r>
-            <a:endParaRPr lang="en-US" sz="900" dirty="0"/>
-          </a:p>
-        </p:txBody>
-      </p:sp>
-      <p:sp>
-        <p:nvSpPr>
-          <p:cNvPr id="26" name="Text 24"/>
-          <p:cNvSpPr txBox="1"/>
-          <p:nvPr/>
-        </p:nvSpPr>
-        <p:spPr>
-          <a:xfrm>
-            <a:off x="6812280" y="6016752"/>
-            <a:ext cx="4416552" cy="219456"/>
-          </a:xfrm>
-          <a:prstGeom prst="rect">
-            <a:avLst/>
-          </a:prstGeom>
-          <a:noFill/>
-          <a:ln/>
-        </p:spPr>
-        <p:txBody>
-          <a:bodyPr wrap="square" lIns="0" tIns="0" rIns="0" bIns="0" rtlCol="0" anchor="ctr">
-            <a:normAutofit/>
-          </a:bodyPr>
-          <a:lstStyle/>
-          <a:p>
-            <a:pPr algn="l" indent="0" marL="0">
-              <a:buNone/>
-            </a:pPr>
-            <a:r>
-              <a:rPr lang="en-US" sz="1100" dirty="0">
-                <a:solidFill>
-                  <a:srgbClr val="0A0A0A"/>
-                </a:solidFill>
-                <a:latin typeface="PingFang SC" pitchFamily="34" charset="0"/>
-                <a:ea typeface="PingFang SC" pitchFamily="34" charset="-122"/>
-                <a:cs typeface="PingFang SC" pitchFamily="34" charset="-120"/>
-              </a:rPr>
-              <a:t>没有权限边界就不开控制</a:t>
-            </a:r>
-            <a:endParaRPr lang="en-US" sz="1100" dirty="0"/>
-          </a:p>
-        </p:txBody>
-      </p:sp>
-      <p:sp>
-        <p:nvSpPr>
-          <p:cNvPr id="25" name="Slide Number Placeholder 0"/>
-          <p:cNvSpPr>
-            <a:spLocks noGrp="1"/>
-          </p:cNvSpPr>
-          <p:nvPr>
-            <p:ph type="sldNum" sz="quarter" idx="4294967295"/>
-          </p:nvPr>
-        </p:nvSpPr>
-        <p:spPr>
-          <a:xfrm>
-            <a:off x="11155680" y="256032"/>
-            <a:ext cx="594360" cy="164592"/>
-          </a:xfrm>
-          <a:prstGeom prst="rect">
-            <a:avLst/>
-          </a:prstGeom>
-          <a:extLst>
-            <a:ext uri="{C572A759-6A51-4108-AA02-DFA0A04FC94B}">
-              <ma14:wrappingTextBoxFlag xmlns:ma14="http://schemas.microsoft.com/office/mac/drawingml/2011/main" val="0"/>
-            </a:ext>
-          </a:extLst>
-        </p:spPr>
-        <p:txBody>
-          <a:bodyPr lIns="0" tIns="0" rIns="0" bIns="0"/>
-          <a:lstStyle>
-            <a:lvl1pPr>
-              <a:defRPr sz="800">
-                <a:solidFill>
-                  <a:srgbClr val="737373"/>
-                </a:solidFill>
-                <a:latin typeface="JetBrains Mono"/>
-                <a:ea typeface="JetBrains Mono"/>
-                <a:cs typeface="JetBrains Mono"/>
-              </a:defRPr>
-            </a:lvl1pPr>
-          </a:lstStyle>
-          <a:p>
-            <a:pPr algn="r"/>
-            <a:fld id="{F7021451-1387-4CA6-816F-3879F97B5CBC}" type="slidenum">
-              <a:rPr b="0" lang="en-US"/>
-              <a:t>10</a:t>
-            </a:fld>
-            <a:endParaRPr lang="en-US"/>
+              <a:t>READ · EXPLAIN · CONFIRM</a:t>
+            </a:r>
+            <a:endParaRPr lang="en-US" sz="750" dirty="0"/>
           </a:p>
         </p:txBody>
       </p:sp>
@@ -3430,6 +3427,1002 @@
 <file path=ppt/slides/slide11.xml><?xml version="1.0" encoding="utf-8"?>
 <p:sld xmlns:a="http://schemas.openxmlformats.org/drawingml/2006/main" xmlns:r="http://schemas.openxmlformats.org/officeDocument/2006/relationships" xmlns:p="http://schemas.openxmlformats.org/presentationml/2006/main">
   <p:cSld name="Slide 11">
+    <p:spTree>
+      <p:nvGrpSpPr>
+        <p:cNvPr id="1" name=""/>
+        <p:cNvGrpSpPr/>
+        <p:nvPr/>
+      </p:nvGrpSpPr>
+      <p:grpSpPr>
+        <a:xfrm>
+          <a:off x="0" y="0"/>
+          <a:ext cx="0" cy="0"/>
+          <a:chOff x="0" y="0"/>
+          <a:chExt cx="0" cy="0"/>
+        </a:xfrm>
+      </p:grpSpPr>
+      <p:sp>
+        <p:nvSpPr>
+          <p:cNvPr id="2" name="Text 0"/>
+          <p:cNvSpPr txBox="1"/>
+          <p:nvPr/>
+        </p:nvSpPr>
+        <p:spPr>
+          <a:xfrm>
+            <a:off x="612648" y="320040"/>
+            <a:ext cx="5120640" cy="164592"/>
+          </a:xfrm>
+          <a:prstGeom prst="rect">
+            <a:avLst/>
+          </a:prstGeom>
+          <a:noFill/>
+          <a:ln/>
+        </p:spPr>
+        <p:txBody>
+          <a:bodyPr wrap="square" lIns="0" tIns="0" rIns="0" bIns="0" rtlCol="0" anchor="ctr">
+            <a:normAutofit/>
+          </a:bodyPr>
+          <a:lstStyle/>
+          <a:p>
+            <a:pPr algn="l" indent="0" marL="0">
+              <a:buNone/>
+            </a:pPr>
+            <a:r>
+              <a:rPr lang="en-US" sz="800" spc="210" kern="0" dirty="0">
+                <a:solidFill>
+                  <a:srgbClr val="737373"/>
+                </a:solidFill>
+                <a:latin typeface="JetBrains Mono" pitchFamily="34" charset="0"/>
+                <a:ea typeface="JetBrains Mono" pitchFamily="34" charset="-122"/>
+                <a:cs typeface="JetBrains Mono" pitchFamily="34" charset="-120"/>
+              </a:rPr>
+              <a:t>STATUS · EVIDENCE FIRST</a:t>
+            </a:r>
+            <a:endParaRPr lang="en-US" sz="800" dirty="0"/>
+          </a:p>
+        </p:txBody>
+      </p:sp>
+      <p:sp>
+        <p:nvSpPr>
+          <p:cNvPr id="3" name="Text 1"/>
+          <p:cNvSpPr txBox="1"/>
+          <p:nvPr/>
+        </p:nvSpPr>
+        <p:spPr>
+          <a:xfrm>
+            <a:off x="9738360" y="320040"/>
+            <a:ext cx="1828800" cy="164592"/>
+          </a:xfrm>
+          <a:prstGeom prst="rect">
+            <a:avLst/>
+          </a:prstGeom>
+          <a:noFill/>
+          <a:ln/>
+        </p:spPr>
+        <p:txBody>
+          <a:bodyPr wrap="square" lIns="0" tIns="0" rIns="0" bIns="0" rtlCol="0" anchor="ctr">
+            <a:normAutofit/>
+          </a:bodyPr>
+          <a:lstStyle/>
+          <a:p>
+            <a:pPr algn="r" indent="0" marL="0">
+              <a:buNone/>
+            </a:pPr>
+            <a:r>
+              <a:rPr lang="en-US" sz="800" spc="210" kern="0" dirty="0">
+                <a:solidFill>
+                  <a:srgbClr val="737373"/>
+                </a:solidFill>
+                <a:latin typeface="JetBrains Mono" pitchFamily="34" charset="0"/>
+                <a:ea typeface="JetBrains Mono" pitchFamily="34" charset="-122"/>
+                <a:cs typeface="JetBrains Mono" pitchFamily="34" charset="-120"/>
+              </a:rPr>
+              <a:t>11 / 13</a:t>
+            </a:r>
+            <a:endParaRPr lang="en-US" sz="800" dirty="0"/>
+          </a:p>
+        </p:txBody>
+      </p:sp>
+      <p:sp>
+        <p:nvSpPr>
+          <p:cNvPr id="4" name="Text 2"/>
+          <p:cNvSpPr txBox="1"/>
+          <p:nvPr/>
+        </p:nvSpPr>
+        <p:spPr>
+          <a:xfrm>
+            <a:off x="612648" y="713232"/>
+            <a:ext cx="7315200" cy="201168"/>
+          </a:xfrm>
+          <a:prstGeom prst="rect">
+            <a:avLst/>
+          </a:prstGeom>
+          <a:noFill/>
+          <a:ln/>
+        </p:spPr>
+        <p:txBody>
+          <a:bodyPr wrap="square" lIns="0" tIns="0" rIns="0" bIns="0" rtlCol="0" anchor="ctr">
+            <a:normAutofit/>
+          </a:bodyPr>
+          <a:lstStyle/>
+          <a:p>
+            <a:pPr algn="l" indent="0" marL="0">
+              <a:buNone/>
+            </a:pPr>
+            <a:r>
+              <a:rPr lang="en-US" sz="900" spc="130" kern="0" dirty="0">
+                <a:solidFill>
+                  <a:srgbClr val="737373"/>
+                </a:solidFill>
+                <a:latin typeface="PingFang SC" pitchFamily="34" charset="0"/>
+                <a:ea typeface="PingFang SC" pitchFamily="34" charset="-122"/>
+                <a:cs typeface="PingFang SC" pitchFamily="34" charset="-120"/>
+              </a:rPr>
+              <a:t>规划介绍最重要的是不把未来写成现在</a:t>
+            </a:r>
+            <a:endParaRPr lang="en-US" sz="900" dirty="0"/>
+          </a:p>
+        </p:txBody>
+      </p:sp>
+      <p:sp>
+        <p:nvSpPr>
+          <p:cNvPr id="5" name="Text 3"/>
+          <p:cNvSpPr txBox="1"/>
+          <p:nvPr/>
+        </p:nvSpPr>
+        <p:spPr>
+          <a:xfrm>
+            <a:off x="612648" y="932688"/>
+            <a:ext cx="10698480" cy="566928"/>
+          </a:xfrm>
+          <a:prstGeom prst="rect">
+            <a:avLst/>
+          </a:prstGeom>
+          <a:noFill/>
+          <a:ln/>
+        </p:spPr>
+        <p:txBody>
+          <a:bodyPr wrap="square" lIns="0" tIns="0" rIns="0" bIns="0" rtlCol="0" anchor="ctr">
+            <a:normAutofit/>
+          </a:bodyPr>
+          <a:lstStyle/>
+          <a:p>
+            <a:pPr algn="l" indent="0" marL="0">
+              <a:buNone/>
+            </a:pPr>
+            <a:r>
+              <a:rPr lang="en-US" sz="2900" dirty="0">
+                <a:solidFill>
+                  <a:srgbClr val="0A0A0A"/>
+                </a:solidFill>
+                <a:latin typeface="PingFang SC" pitchFamily="34" charset="0"/>
+                <a:ea typeface="PingFang SC" pitchFamily="34" charset="-122"/>
+                <a:cs typeface="PingFang SC" pitchFamily="34" charset="-120"/>
+              </a:rPr>
+              <a:t>已有骨架，不等于链路完成</a:t>
+            </a:r>
+            <a:endParaRPr lang="en-US" sz="2900" dirty="0"/>
+          </a:p>
+        </p:txBody>
+      </p:sp>
+      <p:sp>
+        <p:nvSpPr>
+          <p:cNvPr id="6" name="Shape 4"/>
+          <p:cNvSpPr/>
+          <p:nvPr/>
+        </p:nvSpPr>
+        <p:spPr>
+          <a:xfrm>
+            <a:off x="6089904" y="1865376"/>
+            <a:ext cx="0" cy="4133088"/>
+          </a:xfrm>
+          <a:prstGeom prst="line">
+            <a:avLst/>
+          </a:prstGeom>
+          <a:noFill/>
+          <a:ln w="8890">
+            <a:solidFill>
+              <a:srgbClr val="D4D4D2"/>
+            </a:solidFill>
+            <a:prstDash val="solid"/>
+          </a:ln>
+        </p:spPr>
+      </p:sp>
+      <p:sp>
+        <p:nvSpPr>
+          <p:cNvPr id="7" name="Text 5"/>
+          <p:cNvSpPr txBox="1"/>
+          <p:nvPr/>
+        </p:nvSpPr>
+        <p:spPr>
+          <a:xfrm>
+            <a:off x="658368" y="1792224"/>
+            <a:ext cx="4389120" cy="228600"/>
+          </a:xfrm>
+          <a:prstGeom prst="rect">
+            <a:avLst/>
+          </a:prstGeom>
+          <a:noFill/>
+          <a:ln/>
+        </p:spPr>
+        <p:txBody>
+          <a:bodyPr wrap="square" lIns="0" tIns="0" rIns="0" bIns="0" rtlCol="0" anchor="ctr">
+            <a:normAutofit/>
+          </a:bodyPr>
+          <a:lstStyle/>
+          <a:p>
+            <a:pPr algn="l" indent="0" marL="0">
+              <a:buNone/>
+            </a:pPr>
+            <a:r>
+              <a:rPr lang="en-US" sz="900" spc="170" kern="0" dirty="0">
+                <a:solidFill>
+                  <a:srgbClr val="737373"/>
+                </a:solidFill>
+                <a:latin typeface="JetBrains Mono" pitchFamily="34" charset="0"/>
+                <a:ea typeface="JetBrains Mono" pitchFamily="34" charset="-122"/>
+                <a:cs typeface="JetBrains Mono" pitchFamily="34" charset="-120"/>
+              </a:rPr>
+              <a:t>A  AVAILABLE NOW</a:t>
+            </a:r>
+            <a:endParaRPr lang="en-US" sz="900" dirty="0"/>
+          </a:p>
+        </p:txBody>
+      </p:sp>
+      <p:sp>
+        <p:nvSpPr>
+          <p:cNvPr id="8" name="Text 6"/>
+          <p:cNvSpPr txBox="1"/>
+          <p:nvPr/>
+        </p:nvSpPr>
+        <p:spPr>
+          <a:xfrm>
+            <a:off x="658368" y="2093976"/>
+            <a:ext cx="4389120" cy="402336"/>
+          </a:xfrm>
+          <a:prstGeom prst="rect">
+            <a:avLst/>
+          </a:prstGeom>
+          <a:noFill/>
+          <a:ln/>
+        </p:spPr>
+        <p:txBody>
+          <a:bodyPr wrap="square" lIns="0" tIns="0" rIns="0" bIns="0" rtlCol="0" anchor="ctr">
+            <a:normAutofit/>
+          </a:bodyPr>
+          <a:lstStyle/>
+          <a:p>
+            <a:pPr algn="l" indent="0" marL="0">
+              <a:buNone/>
+            </a:pPr>
+            <a:r>
+              <a:rPr lang="en-US" sz="2300" dirty="0">
+                <a:solidFill>
+                  <a:srgbClr val="0A0A0A"/>
+                </a:solidFill>
+                <a:latin typeface="PingFang SC" pitchFamily="34" charset="0"/>
+                <a:ea typeface="PingFang SC" pitchFamily="34" charset="-122"/>
+                <a:cs typeface="PingFang SC" pitchFamily="34" charset="-120"/>
+              </a:rPr>
+              <a:t>工程骨架</a:t>
+            </a:r>
+            <a:endParaRPr lang="en-US" sz="2300" dirty="0"/>
+          </a:p>
+        </p:txBody>
+      </p:sp>
+      <p:sp>
+        <p:nvSpPr>
+          <p:cNvPr id="9" name="Text 7"/>
+          <p:cNvSpPr txBox="1"/>
+          <p:nvPr/>
+        </p:nvSpPr>
+        <p:spPr>
+          <a:xfrm>
+            <a:off x="658368" y="2551176"/>
+            <a:ext cx="4663440" cy="566928"/>
+          </a:xfrm>
+          <a:prstGeom prst="rect">
+            <a:avLst/>
+          </a:prstGeom>
+          <a:noFill/>
+          <a:ln/>
+        </p:spPr>
+        <p:txBody>
+          <a:bodyPr wrap="square" lIns="0" tIns="0" rIns="0" bIns="0" rtlCol="0" anchor="ctr">
+            <a:normAutofit/>
+          </a:bodyPr>
+          <a:lstStyle/>
+          <a:p>
+            <a:pPr algn="l" indent="0" marL="0">
+              <a:buNone/>
+            </a:pPr>
+            <a:r>
+              <a:rPr lang="en-US" sz="1300" dirty="0">
+                <a:solidFill>
+                  <a:srgbClr val="0A0A0A"/>
+                </a:solidFill>
+                <a:latin typeface="PingFang SC" pitchFamily="34" charset="0"/>
+                <a:ea typeface="PingFang SC" pitchFamily="34" charset="-122"/>
+                <a:cs typeface="PingFang SC" pitchFamily="34" charset="-120"/>
+              </a:rPr>
+              <a:t>协议、Schema、模拟器、Home Assistant 配置样例、部署说明与基础检查已经形成。</a:t>
+            </a:r>
+            <a:endParaRPr lang="en-US" sz="1300" dirty="0"/>
+          </a:p>
+        </p:txBody>
+      </p:sp>
+      <p:sp>
+        <p:nvSpPr>
+          <p:cNvPr id="10" name="Shape 8"/>
+          <p:cNvSpPr/>
+          <p:nvPr/>
+        </p:nvSpPr>
+        <p:spPr>
+          <a:xfrm>
+            <a:off x="658368" y="5285232"/>
+            <a:ext cx="4937760" cy="0"/>
+          </a:xfrm>
+          <a:prstGeom prst="line">
+            <a:avLst/>
+          </a:prstGeom>
+          <a:noFill/>
+          <a:ln w="8890">
+            <a:solidFill>
+              <a:srgbClr val="D4D4D2"/>
+            </a:solidFill>
+            <a:prstDash val="solid"/>
+          </a:ln>
+        </p:spPr>
+      </p:sp>
+      <p:sp>
+        <p:nvSpPr>
+          <p:cNvPr id="11" name="Text 9"/>
+          <p:cNvSpPr txBox="1"/>
+          <p:nvPr/>
+        </p:nvSpPr>
+        <p:spPr>
+          <a:xfrm>
+            <a:off x="658368" y="5449824"/>
+            <a:ext cx="201168" cy="201168"/>
+          </a:xfrm>
+          <a:prstGeom prst="rect">
+            <a:avLst/>
+          </a:prstGeom>
+          <a:noFill/>
+          <a:ln/>
+        </p:spPr>
+        <p:txBody>
+          <a:bodyPr wrap="square" lIns="0" tIns="0" rIns="0" bIns="0" rtlCol="0" anchor="ctr">
+            <a:normAutofit/>
+          </a:bodyPr>
+          <a:lstStyle/>
+          <a:p>
+            <a:pPr algn="l" indent="0" marL="0">
+              <a:buNone/>
+            </a:pPr>
+            <a:r>
+              <a:rPr lang="en-US" sz="900" dirty="0">
+                <a:solidFill>
+                  <a:srgbClr val="737373"/>
+                </a:solidFill>
+                <a:latin typeface="JetBrains Mono" pitchFamily="34" charset="0"/>
+                <a:ea typeface="JetBrains Mono" pitchFamily="34" charset="-122"/>
+                <a:cs typeface="JetBrains Mono" pitchFamily="34" charset="-120"/>
+              </a:rPr>
+              <a:t>—</a:t>
+            </a:r>
+            <a:endParaRPr lang="en-US" sz="900" dirty="0"/>
+          </a:p>
+        </p:txBody>
+      </p:sp>
+      <p:sp>
+        <p:nvSpPr>
+          <p:cNvPr id="12" name="Text 10"/>
+          <p:cNvSpPr txBox="1"/>
+          <p:nvPr/>
+        </p:nvSpPr>
+        <p:spPr>
+          <a:xfrm>
+            <a:off x="905256" y="5449824"/>
+            <a:ext cx="4416552" cy="219456"/>
+          </a:xfrm>
+          <a:prstGeom prst="rect">
+            <a:avLst/>
+          </a:prstGeom>
+          <a:noFill/>
+          <a:ln/>
+        </p:spPr>
+        <p:txBody>
+          <a:bodyPr wrap="square" lIns="0" tIns="0" rIns="0" bIns="0" rtlCol="0" anchor="ctr">
+            <a:normAutofit/>
+          </a:bodyPr>
+          <a:lstStyle/>
+          <a:p>
+            <a:pPr algn="l" indent="0" marL="0">
+              <a:buNone/>
+            </a:pPr>
+            <a:r>
+              <a:rPr lang="en-US" sz="1100" dirty="0">
+                <a:solidFill>
+                  <a:srgbClr val="0A0A0A"/>
+                </a:solidFill>
+                <a:latin typeface="PingFang SC" pitchFamily="34" charset="0"/>
+                <a:ea typeface="PingFang SC" pitchFamily="34" charset="-122"/>
+                <a:cs typeface="PingFang SC" pitchFamily="34" charset="-120"/>
+              </a:rPr>
+              <a:t>UNO R4 WiFi 已确认</a:t>
+            </a:r>
+            <a:endParaRPr lang="en-US" sz="1100" dirty="0"/>
+          </a:p>
+        </p:txBody>
+      </p:sp>
+      <p:sp>
+        <p:nvSpPr>
+          <p:cNvPr id="13" name="Text 11"/>
+          <p:cNvSpPr txBox="1"/>
+          <p:nvPr/>
+        </p:nvSpPr>
+        <p:spPr>
+          <a:xfrm>
+            <a:off x="658368" y="5733288"/>
+            <a:ext cx="201168" cy="201168"/>
+          </a:xfrm>
+          <a:prstGeom prst="rect">
+            <a:avLst/>
+          </a:prstGeom>
+          <a:noFill/>
+          <a:ln/>
+        </p:spPr>
+        <p:txBody>
+          <a:bodyPr wrap="square" lIns="0" tIns="0" rIns="0" bIns="0" rtlCol="0" anchor="ctr">
+            <a:normAutofit/>
+          </a:bodyPr>
+          <a:lstStyle/>
+          <a:p>
+            <a:pPr algn="l" indent="0" marL="0">
+              <a:buNone/>
+            </a:pPr>
+            <a:r>
+              <a:rPr lang="en-US" sz="900" dirty="0">
+                <a:solidFill>
+                  <a:srgbClr val="737373"/>
+                </a:solidFill>
+                <a:latin typeface="JetBrains Mono" pitchFamily="34" charset="0"/>
+                <a:ea typeface="JetBrains Mono" pitchFamily="34" charset="-122"/>
+                <a:cs typeface="JetBrains Mono" pitchFamily="34" charset="-120"/>
+              </a:rPr>
+              <a:t>—</a:t>
+            </a:r>
+            <a:endParaRPr lang="en-US" sz="900" dirty="0"/>
+          </a:p>
+        </p:txBody>
+      </p:sp>
+      <p:sp>
+        <p:nvSpPr>
+          <p:cNvPr id="14" name="Text 12"/>
+          <p:cNvSpPr txBox="1"/>
+          <p:nvPr/>
+        </p:nvSpPr>
+        <p:spPr>
+          <a:xfrm>
+            <a:off x="905256" y="5733288"/>
+            <a:ext cx="4416552" cy="219456"/>
+          </a:xfrm>
+          <a:prstGeom prst="rect">
+            <a:avLst/>
+          </a:prstGeom>
+          <a:noFill/>
+          <a:ln/>
+        </p:spPr>
+        <p:txBody>
+          <a:bodyPr wrap="square" lIns="0" tIns="0" rIns="0" bIns="0" rtlCol="0" anchor="ctr">
+            <a:normAutofit/>
+          </a:bodyPr>
+          <a:lstStyle/>
+          <a:p>
+            <a:pPr algn="l" indent="0" marL="0">
+              <a:buNone/>
+            </a:pPr>
+            <a:r>
+              <a:rPr lang="en-US" sz="1100" dirty="0">
+                <a:solidFill>
+                  <a:srgbClr val="0A0A0A"/>
+                </a:solidFill>
+                <a:latin typeface="PingFang SC" pitchFamily="34" charset="0"/>
+                <a:ea typeface="PingFang SC" pitchFamily="34" charset="-122"/>
+                <a:cs typeface="PingFang SC" pitchFamily="34" charset="-120"/>
+              </a:rPr>
+              <a:t>模拟数据显式标记 simulated=true</a:t>
+            </a:r>
+            <a:endParaRPr lang="en-US" sz="1100" dirty="0"/>
+          </a:p>
+        </p:txBody>
+      </p:sp>
+      <p:sp>
+        <p:nvSpPr>
+          <p:cNvPr id="15" name="Text 13"/>
+          <p:cNvSpPr txBox="1"/>
+          <p:nvPr/>
+        </p:nvSpPr>
+        <p:spPr>
+          <a:xfrm>
+            <a:off x="658368" y="6016752"/>
+            <a:ext cx="201168" cy="201168"/>
+          </a:xfrm>
+          <a:prstGeom prst="rect">
+            <a:avLst/>
+          </a:prstGeom>
+          <a:noFill/>
+          <a:ln/>
+        </p:spPr>
+        <p:txBody>
+          <a:bodyPr wrap="square" lIns="0" tIns="0" rIns="0" bIns="0" rtlCol="0" anchor="ctr">
+            <a:normAutofit/>
+          </a:bodyPr>
+          <a:lstStyle/>
+          <a:p>
+            <a:pPr algn="l" indent="0" marL="0">
+              <a:buNone/>
+            </a:pPr>
+            <a:r>
+              <a:rPr lang="en-US" sz="900" dirty="0">
+                <a:solidFill>
+                  <a:srgbClr val="737373"/>
+                </a:solidFill>
+                <a:latin typeface="JetBrains Mono" pitchFamily="34" charset="0"/>
+                <a:ea typeface="JetBrains Mono" pitchFamily="34" charset="-122"/>
+                <a:cs typeface="JetBrains Mono" pitchFamily="34" charset="-120"/>
+              </a:rPr>
+              <a:t>—</a:t>
+            </a:r>
+            <a:endParaRPr lang="en-US" sz="900" dirty="0"/>
+          </a:p>
+        </p:txBody>
+      </p:sp>
+      <p:sp>
+        <p:nvSpPr>
+          <p:cNvPr id="16" name="Text 14"/>
+          <p:cNvSpPr txBox="1"/>
+          <p:nvPr/>
+        </p:nvSpPr>
+        <p:spPr>
+          <a:xfrm>
+            <a:off x="905256" y="6016752"/>
+            <a:ext cx="4416552" cy="219456"/>
+          </a:xfrm>
+          <a:prstGeom prst="rect">
+            <a:avLst/>
+          </a:prstGeom>
+          <a:noFill/>
+          <a:ln/>
+        </p:spPr>
+        <p:txBody>
+          <a:bodyPr wrap="square" lIns="0" tIns="0" rIns="0" bIns="0" rtlCol="0" anchor="ctr">
+            <a:normAutofit/>
+          </a:bodyPr>
+          <a:lstStyle/>
+          <a:p>
+            <a:pPr algn="l" indent="0" marL="0">
+              <a:buNone/>
+            </a:pPr>
+            <a:r>
+              <a:rPr lang="en-US" sz="1100" dirty="0">
+                <a:solidFill>
+                  <a:srgbClr val="0A0A0A"/>
+                </a:solidFill>
+                <a:latin typeface="PingFang SC" pitchFamily="34" charset="0"/>
+                <a:ea typeface="PingFang SC" pitchFamily="34" charset="-122"/>
+                <a:cs typeface="PingFang SC" pitchFamily="34" charset="-120"/>
+              </a:rPr>
+              <a:t>架构与安全边界已有文档</a:t>
+            </a:r>
+            <a:endParaRPr lang="en-US" sz="1100" dirty="0"/>
+          </a:p>
+        </p:txBody>
+      </p:sp>
+      <p:sp>
+        <p:nvSpPr>
+          <p:cNvPr id="17" name="Text 15"/>
+          <p:cNvSpPr txBox="1"/>
+          <p:nvPr/>
+        </p:nvSpPr>
+        <p:spPr>
+          <a:xfrm>
+            <a:off x="6565392" y="1792224"/>
+            <a:ext cx="4389120" cy="228600"/>
+          </a:xfrm>
+          <a:prstGeom prst="rect">
+            <a:avLst/>
+          </a:prstGeom>
+          <a:noFill/>
+          <a:ln/>
+        </p:spPr>
+        <p:txBody>
+          <a:bodyPr wrap="square" lIns="0" tIns="0" rIns="0" bIns="0" rtlCol="0" anchor="ctr">
+            <a:normAutofit/>
+          </a:bodyPr>
+          <a:lstStyle/>
+          <a:p>
+            <a:pPr algn="l" indent="0" marL="0">
+              <a:buNone/>
+            </a:pPr>
+            <a:r>
+              <a:rPr lang="en-US" sz="900" spc="170" kern="0" dirty="0">
+                <a:solidFill>
+                  <a:srgbClr val="002FA7"/>
+                </a:solidFill>
+                <a:latin typeface="JetBrains Mono" pitchFamily="34" charset="0"/>
+                <a:ea typeface="JetBrains Mono" pitchFamily="34" charset="-122"/>
+                <a:cs typeface="JetBrains Mono" pitchFamily="34" charset="-120"/>
+              </a:rPr>
+              <a:t>B  NOT VERIFIED YET</a:t>
+            </a:r>
+            <a:endParaRPr lang="en-US" sz="900" dirty="0"/>
+          </a:p>
+        </p:txBody>
+      </p:sp>
+      <p:sp>
+        <p:nvSpPr>
+          <p:cNvPr id="18" name="Text 16"/>
+          <p:cNvSpPr txBox="1"/>
+          <p:nvPr/>
+        </p:nvSpPr>
+        <p:spPr>
+          <a:xfrm>
+            <a:off x="6565392" y="2093976"/>
+            <a:ext cx="4389120" cy="402336"/>
+          </a:xfrm>
+          <a:prstGeom prst="rect">
+            <a:avLst/>
+          </a:prstGeom>
+          <a:noFill/>
+          <a:ln/>
+        </p:spPr>
+        <p:txBody>
+          <a:bodyPr wrap="square" lIns="0" tIns="0" rIns="0" bIns="0" rtlCol="0" anchor="ctr">
+            <a:normAutofit/>
+          </a:bodyPr>
+          <a:lstStyle/>
+          <a:p>
+            <a:pPr algn="l" indent="0" marL="0">
+              <a:buNone/>
+            </a:pPr>
+            <a:r>
+              <a:rPr lang="en-US" sz="2300" dirty="0">
+                <a:solidFill>
+                  <a:srgbClr val="002FA7"/>
+                </a:solidFill>
+                <a:latin typeface="PingFang SC" pitchFamily="34" charset="0"/>
+                <a:ea typeface="PingFang SC" pitchFamily="34" charset="-122"/>
+                <a:cs typeface="PingFang SC" pitchFamily="34" charset="-120"/>
+              </a:rPr>
+              <a:t>真实验收</a:t>
+            </a:r>
+            <a:endParaRPr lang="en-US" sz="2300" dirty="0"/>
+          </a:p>
+        </p:txBody>
+      </p:sp>
+      <p:sp>
+        <p:nvSpPr>
+          <p:cNvPr id="19" name="Text 17"/>
+          <p:cNvSpPr txBox="1"/>
+          <p:nvPr/>
+        </p:nvSpPr>
+        <p:spPr>
+          <a:xfrm>
+            <a:off x="6565392" y="2551176"/>
+            <a:ext cx="4663440" cy="621792"/>
+          </a:xfrm>
+          <a:prstGeom prst="rect">
+            <a:avLst/>
+          </a:prstGeom>
+          <a:noFill/>
+          <a:ln/>
+        </p:spPr>
+        <p:txBody>
+          <a:bodyPr wrap="square" lIns="0" tIns="0" rIns="0" bIns="0" rtlCol="0" anchor="ctr">
+            <a:normAutofit/>
+          </a:bodyPr>
+          <a:lstStyle/>
+          <a:p>
+            <a:pPr algn="l" indent="0" marL="0">
+              <a:buNone/>
+            </a:pPr>
+            <a:r>
+              <a:rPr lang="en-US" sz="1300" dirty="0">
+                <a:solidFill>
+                  <a:srgbClr val="0A0A0A"/>
+                </a:solidFill>
+                <a:latin typeface="PingFang SC" pitchFamily="34" charset="0"/>
+                <a:ea typeface="PingFang SC" pitchFamily="34" charset="-122"/>
+                <a:cs typeface="PingFang SC" pitchFamily="34" charset="-120"/>
+              </a:rPr>
+              <a:t>传感器型号、真实采样、MQTT/HA/Hermes 联调、设备控制与完整无线节点仍待现场验证。</a:t>
+            </a:r>
+            <a:endParaRPr lang="en-US" sz="1300" dirty="0"/>
+          </a:p>
+        </p:txBody>
+      </p:sp>
+      <p:sp>
+        <p:nvSpPr>
+          <p:cNvPr id="20" name="Shape 18"/>
+          <p:cNvSpPr/>
+          <p:nvPr/>
+        </p:nvSpPr>
+        <p:spPr>
+          <a:xfrm>
+            <a:off x="6565392" y="5285232"/>
+            <a:ext cx="4937760" cy="0"/>
+          </a:xfrm>
+          <a:prstGeom prst="line">
+            <a:avLst/>
+          </a:prstGeom>
+          <a:noFill/>
+          <a:ln w="8890">
+            <a:solidFill>
+              <a:srgbClr val="D4D4D2"/>
+            </a:solidFill>
+            <a:prstDash val="solid"/>
+          </a:ln>
+        </p:spPr>
+      </p:sp>
+      <p:sp>
+        <p:nvSpPr>
+          <p:cNvPr id="21" name="Text 19"/>
+          <p:cNvSpPr txBox="1"/>
+          <p:nvPr/>
+        </p:nvSpPr>
+        <p:spPr>
+          <a:xfrm>
+            <a:off x="6565392" y="5449824"/>
+            <a:ext cx="201168" cy="201168"/>
+          </a:xfrm>
+          <a:prstGeom prst="rect">
+            <a:avLst/>
+          </a:prstGeom>
+          <a:noFill/>
+          <a:ln/>
+        </p:spPr>
+        <p:txBody>
+          <a:bodyPr wrap="square" lIns="0" tIns="0" rIns="0" bIns="0" rtlCol="0" anchor="ctr">
+            <a:normAutofit/>
+          </a:bodyPr>
+          <a:lstStyle/>
+          <a:p>
+            <a:pPr algn="l" indent="0" marL="0">
+              <a:buNone/>
+            </a:pPr>
+            <a:r>
+              <a:rPr lang="en-US" sz="900" dirty="0">
+                <a:solidFill>
+                  <a:srgbClr val="002FA7"/>
+                </a:solidFill>
+                <a:latin typeface="JetBrains Mono" pitchFamily="34" charset="0"/>
+                <a:ea typeface="JetBrains Mono" pitchFamily="34" charset="-122"/>
+                <a:cs typeface="JetBrains Mono" pitchFamily="34" charset="-120"/>
+              </a:rPr>
+              <a:t>—</a:t>
+            </a:r>
+            <a:endParaRPr lang="en-US" sz="900" dirty="0"/>
+          </a:p>
+        </p:txBody>
+      </p:sp>
+      <p:sp>
+        <p:nvSpPr>
+          <p:cNvPr id="22" name="Text 20"/>
+          <p:cNvSpPr txBox="1"/>
+          <p:nvPr/>
+        </p:nvSpPr>
+        <p:spPr>
+          <a:xfrm>
+            <a:off x="6812280" y="5449824"/>
+            <a:ext cx="4416552" cy="219456"/>
+          </a:xfrm>
+          <a:prstGeom prst="rect">
+            <a:avLst/>
+          </a:prstGeom>
+          <a:noFill/>
+          <a:ln/>
+        </p:spPr>
+        <p:txBody>
+          <a:bodyPr wrap="square" lIns="0" tIns="0" rIns="0" bIns="0" rtlCol="0" anchor="ctr">
+            <a:normAutofit/>
+          </a:bodyPr>
+          <a:lstStyle/>
+          <a:p>
+            <a:pPr algn="l" indent="0" marL="0">
+              <a:buNone/>
+            </a:pPr>
+            <a:r>
+              <a:rPr lang="en-US" sz="1100" dirty="0">
+                <a:solidFill>
+                  <a:srgbClr val="0A0A0A"/>
+                </a:solidFill>
+                <a:latin typeface="PingFang SC" pitchFamily="34" charset="0"/>
+                <a:ea typeface="PingFang SC" pitchFamily="34" charset="-122"/>
+                <a:cs typeface="PingFang SC" pitchFamily="34" charset="-120"/>
+              </a:rPr>
+              <a:t>不虚构硬件测试结果</a:t>
+            </a:r>
+            <a:endParaRPr lang="en-US" sz="1100" dirty="0"/>
+          </a:p>
+        </p:txBody>
+      </p:sp>
+      <p:sp>
+        <p:nvSpPr>
+          <p:cNvPr id="23" name="Text 21"/>
+          <p:cNvSpPr txBox="1"/>
+          <p:nvPr/>
+        </p:nvSpPr>
+        <p:spPr>
+          <a:xfrm>
+            <a:off x="6565392" y="5733288"/>
+            <a:ext cx="201168" cy="201168"/>
+          </a:xfrm>
+          <a:prstGeom prst="rect">
+            <a:avLst/>
+          </a:prstGeom>
+          <a:noFill/>
+          <a:ln/>
+        </p:spPr>
+        <p:txBody>
+          <a:bodyPr wrap="square" lIns="0" tIns="0" rIns="0" bIns="0" rtlCol="0" anchor="ctr">
+            <a:normAutofit/>
+          </a:bodyPr>
+          <a:lstStyle/>
+          <a:p>
+            <a:pPr algn="l" indent="0" marL="0">
+              <a:buNone/>
+            </a:pPr>
+            <a:r>
+              <a:rPr lang="en-US" sz="900" dirty="0">
+                <a:solidFill>
+                  <a:srgbClr val="002FA7"/>
+                </a:solidFill>
+                <a:latin typeface="JetBrains Mono" pitchFamily="34" charset="0"/>
+                <a:ea typeface="JetBrains Mono" pitchFamily="34" charset="-122"/>
+                <a:cs typeface="JetBrains Mono" pitchFamily="34" charset="-120"/>
+              </a:rPr>
+              <a:t>—</a:t>
+            </a:r>
+            <a:endParaRPr lang="en-US" sz="900" dirty="0"/>
+          </a:p>
+        </p:txBody>
+      </p:sp>
+      <p:sp>
+        <p:nvSpPr>
+          <p:cNvPr id="24" name="Text 22"/>
+          <p:cNvSpPr txBox="1"/>
+          <p:nvPr/>
+        </p:nvSpPr>
+        <p:spPr>
+          <a:xfrm>
+            <a:off x="6812280" y="5733288"/>
+            <a:ext cx="4416552" cy="219456"/>
+          </a:xfrm>
+          <a:prstGeom prst="rect">
+            <a:avLst/>
+          </a:prstGeom>
+          <a:noFill/>
+          <a:ln/>
+        </p:spPr>
+        <p:txBody>
+          <a:bodyPr wrap="square" lIns="0" tIns="0" rIns="0" bIns="0" rtlCol="0" anchor="ctr">
+            <a:normAutofit/>
+          </a:bodyPr>
+          <a:lstStyle/>
+          <a:p>
+            <a:pPr algn="l" indent="0" marL="0">
+              <a:buNone/>
+            </a:pPr>
+            <a:r>
+              <a:rPr lang="en-US" sz="1100" dirty="0">
+                <a:solidFill>
+                  <a:srgbClr val="0A0A0A"/>
+                </a:solidFill>
+                <a:latin typeface="PingFang SC" pitchFamily="34" charset="0"/>
+                <a:ea typeface="PingFang SC" pitchFamily="34" charset="-122"/>
+                <a:cs typeface="PingFang SC" pitchFamily="34" charset="-120"/>
+              </a:rPr>
+              <a:t>不把静态配置说成已部署</a:t>
+            </a:r>
+            <a:endParaRPr lang="en-US" sz="1100" dirty="0"/>
+          </a:p>
+        </p:txBody>
+      </p:sp>
+      <p:sp>
+        <p:nvSpPr>
+          <p:cNvPr id="25" name="Text 23"/>
+          <p:cNvSpPr txBox="1"/>
+          <p:nvPr/>
+        </p:nvSpPr>
+        <p:spPr>
+          <a:xfrm>
+            <a:off x="6565392" y="6016752"/>
+            <a:ext cx="201168" cy="201168"/>
+          </a:xfrm>
+          <a:prstGeom prst="rect">
+            <a:avLst/>
+          </a:prstGeom>
+          <a:noFill/>
+          <a:ln/>
+        </p:spPr>
+        <p:txBody>
+          <a:bodyPr wrap="square" lIns="0" tIns="0" rIns="0" bIns="0" rtlCol="0" anchor="ctr">
+            <a:normAutofit/>
+          </a:bodyPr>
+          <a:lstStyle/>
+          <a:p>
+            <a:pPr algn="l" indent="0" marL="0">
+              <a:buNone/>
+            </a:pPr>
+            <a:r>
+              <a:rPr lang="en-US" sz="900" dirty="0">
+                <a:solidFill>
+                  <a:srgbClr val="002FA7"/>
+                </a:solidFill>
+                <a:latin typeface="JetBrains Mono" pitchFamily="34" charset="0"/>
+                <a:ea typeface="JetBrains Mono" pitchFamily="34" charset="-122"/>
+                <a:cs typeface="JetBrains Mono" pitchFamily="34" charset="-120"/>
+              </a:rPr>
+              <a:t>—</a:t>
+            </a:r>
+            <a:endParaRPr lang="en-US" sz="900" dirty="0"/>
+          </a:p>
+        </p:txBody>
+      </p:sp>
+      <p:sp>
+        <p:nvSpPr>
+          <p:cNvPr id="26" name="Text 24"/>
+          <p:cNvSpPr txBox="1"/>
+          <p:nvPr/>
+        </p:nvSpPr>
+        <p:spPr>
+          <a:xfrm>
+            <a:off x="6812280" y="6016752"/>
+            <a:ext cx="4416552" cy="219456"/>
+          </a:xfrm>
+          <a:prstGeom prst="rect">
+            <a:avLst/>
+          </a:prstGeom>
+          <a:noFill/>
+          <a:ln/>
+        </p:spPr>
+        <p:txBody>
+          <a:bodyPr wrap="square" lIns="0" tIns="0" rIns="0" bIns="0" rtlCol="0" anchor="ctr">
+            <a:normAutofit/>
+          </a:bodyPr>
+          <a:lstStyle/>
+          <a:p>
+            <a:pPr algn="l" indent="0" marL="0">
+              <a:buNone/>
+            </a:pPr>
+            <a:r>
+              <a:rPr lang="en-US" sz="1100" dirty="0">
+                <a:solidFill>
+                  <a:srgbClr val="0A0A0A"/>
+                </a:solidFill>
+                <a:latin typeface="PingFang SC" pitchFamily="34" charset="0"/>
+                <a:ea typeface="PingFang SC" pitchFamily="34" charset="-122"/>
+                <a:cs typeface="PingFang SC" pitchFamily="34" charset="-120"/>
+              </a:rPr>
+              <a:t>没有权限边界就不开控制</a:t>
+            </a:r>
+            <a:endParaRPr lang="en-US" sz="1100" dirty="0"/>
+          </a:p>
+        </p:txBody>
+      </p:sp>
+    </p:spTree>
+  </p:cSld>
+  <p:clrMapOvr>
+    <a:masterClrMapping/>
+  </p:clrMapOvr>
+</p:sld>
+</file>
+
+<file path=ppt/slides/slide12.xml><?xml version="1.0" encoding="utf-8"?>
+<p:sld xmlns:a="http://schemas.openxmlformats.org/drawingml/2006/main" xmlns:r="http://schemas.openxmlformats.org/officeDocument/2006/relationships" xmlns:p="http://schemas.openxmlformats.org/presentationml/2006/main">
+  <p:cSld name="Slide 12">
     <p:bg>
       <p:bgPr>
         <a:solidFill>
@@ -3527,7 +4520,7 @@
                 <a:ea typeface="JetBrains Mono" pitchFamily="34" charset="-122"/>
                 <a:cs typeface="JetBrains Mono" pitchFamily="34" charset="-120"/>
               </a:rPr>
-              <a:t>11 / 12</a:t>
+              <a:t>12 / 13</a:t>
             </a:r>
             <a:endParaRPr lang="en-US" sz="800" dirty="0"/>
           </a:p>
@@ -4515,54 +5508,6 @@
           </a:p>
         </p:txBody>
       </p:sp>
-      <p:sp>
-        <p:nvSpPr>
-          <p:cNvPr id="25" name="Slide Number Placeholder 0"/>
-          <p:cNvSpPr>
-            <a:spLocks noGrp="1"/>
-          </p:cNvSpPr>
-          <p:nvPr>
-            <p:ph type="sldNum" sz="quarter" idx="4294967295"/>
-          </p:nvPr>
-        </p:nvSpPr>
-        <p:spPr>
-          <a:xfrm>
-            <a:off x="11155680" y="256032"/>
-            <a:ext cx="594360" cy="164592"/>
-          </a:xfrm>
-          <a:prstGeom prst="rect">
-            <a:avLst/>
-          </a:prstGeom>
-          <a:extLst>
-            <a:ext uri="{C572A759-6A51-4108-AA02-DFA0A04FC94B}">
-              <ma14:wrappingTextBoxFlag xmlns:ma14="http://schemas.microsoft.com/office/mac/drawingml/2011/main" val="0"/>
-            </a:ext>
-          </a:extLst>
-        </p:spPr>
-        <p:txBody>
-          <a:bodyPr lIns="0" tIns="0" rIns="0" bIns="0"/>
-          <a:lstStyle>
-            <a:lvl1pPr>
-              <a:defRPr sz="800">
-                <a:solidFill>
-                  <a:srgbClr val="737373"/>
-                </a:solidFill>
-                <a:latin typeface="JetBrains Mono"/>
-                <a:ea typeface="JetBrains Mono"/>
-                <a:cs typeface="JetBrains Mono"/>
-              </a:defRPr>
-            </a:lvl1pPr>
-          </a:lstStyle>
-          <a:p>
-            <a:pPr algn="r"/>
-            <a:fld id="{F7021451-1387-4CA6-816F-3879F97B5CBC}" type="slidenum">
-              <a:rPr b="0" lang="en-US"/>
-              <a:t>11</a:t>
-            </a:fld>
-            <a:endParaRPr lang="en-US"/>
-          </a:p>
-        </p:txBody>
-      </p:sp>
     </p:spTree>
   </p:cSld>
   <p:clrMapOvr>
@@ -4571,9 +5516,9 @@
 </p:sld>
 </file>
 
-<file path=ppt/slides/slide12.xml><?xml version="1.0" encoding="utf-8"?>
+<file path=ppt/slides/slide13.xml><?xml version="1.0" encoding="utf-8"?>
 <p:sld xmlns:a="http://schemas.openxmlformats.org/drawingml/2006/main" xmlns:r="http://schemas.openxmlformats.org/officeDocument/2006/relationships" xmlns:p="http://schemas.openxmlformats.org/presentationml/2006/main">
-  <p:cSld name="Slide 12">
+  <p:cSld name="Slide 13">
     <p:spTree>
       <p:nvGrpSpPr>
         <p:cNvPr id="1" name=""/>
@@ -4677,7 +5622,7 @@
                 <a:ea typeface="JetBrains Mono" pitchFamily="34" charset="-122"/>
                 <a:cs typeface="JetBrains Mono" pitchFamily="34" charset="-120"/>
               </a:rPr>
-              <a:t>12 / 12</a:t>
+              <a:t>13 / 13</a:t>
             </a:r>
             <a:endParaRPr lang="en-US" sz="800" dirty="0"/>
           </a:p>
@@ -5654,7 +6599,7 @@
                 <a:ea typeface="JetBrains Mono" pitchFamily="34" charset="-122"/>
                 <a:cs typeface="JetBrains Mono" pitchFamily="34" charset="-120"/>
               </a:rPr>
-              <a:t>02 / 12</a:t>
+              <a:t>02 / 13</a:t>
             </a:r>
             <a:endParaRPr lang="en-US" sz="800" dirty="0"/>
           </a:p>
@@ -6546,54 +7491,6 @@
               <a:t>让状态可以被查询与解释</a:t>
             </a:r>
             <a:endParaRPr lang="en-US" sz="1100" dirty="0"/>
-          </a:p>
-        </p:txBody>
-      </p:sp>
-      <p:sp>
-        <p:nvSpPr>
-          <p:cNvPr id="25" name="Slide Number Placeholder 0"/>
-          <p:cNvSpPr>
-            <a:spLocks noGrp="1"/>
-          </p:cNvSpPr>
-          <p:nvPr>
-            <p:ph type="sldNum" sz="quarter" idx="4294967295"/>
-          </p:nvPr>
-        </p:nvSpPr>
-        <p:spPr>
-          <a:xfrm>
-            <a:off x="11155680" y="256032"/>
-            <a:ext cx="594360" cy="164592"/>
-          </a:xfrm>
-          <a:prstGeom prst="rect">
-            <a:avLst/>
-          </a:prstGeom>
-          <a:extLst>
-            <a:ext uri="{C572A759-6A51-4108-AA02-DFA0A04FC94B}">
-              <ma14:wrappingTextBoxFlag xmlns:ma14="http://schemas.microsoft.com/office/mac/drawingml/2011/main" val="0"/>
-            </a:ext>
-          </a:extLst>
-        </p:spPr>
-        <p:txBody>
-          <a:bodyPr lIns="0" tIns="0" rIns="0" bIns="0"/>
-          <a:lstStyle>
-            <a:lvl1pPr>
-              <a:defRPr sz="800">
-                <a:solidFill>
-                  <a:srgbClr val="737373"/>
-                </a:solidFill>
-                <a:latin typeface="JetBrains Mono"/>
-                <a:ea typeface="JetBrains Mono"/>
-                <a:cs typeface="JetBrains Mono"/>
-              </a:defRPr>
-            </a:lvl1pPr>
-          </a:lstStyle>
-          <a:p>
-            <a:pPr algn="r"/>
-            <a:fld id="{F7021451-1387-4CA6-816F-3879F97B5CBC}" type="slidenum">
-              <a:rPr b="0" lang="en-US"/>
-              <a:t>2</a:t>
-            </a:fld>
-            <a:endParaRPr lang="en-US"/>
           </a:p>
         </p:txBody>
       </p:sp>
@@ -6705,7 +7602,7 @@
                 <a:ea typeface="JetBrains Mono" pitchFamily="34" charset="-122"/>
                 <a:cs typeface="JetBrains Mono" pitchFamily="34" charset="-120"/>
               </a:rPr>
-              <a:t>03 / 12</a:t>
+              <a:t>03 / 13</a:t>
             </a:r>
             <a:endParaRPr lang="en-US" sz="800" dirty="0"/>
           </a:p>
@@ -7487,7 +8384,7 @@
                 <a:ea typeface="JetBrains Mono" pitchFamily="34" charset="-122"/>
                 <a:cs typeface="JetBrains Mono" pitchFamily="34" charset="-120"/>
               </a:rPr>
-              <a:t>04 / 12</a:t>
+              <a:t>04 / 13</a:t>
             </a:r>
             <a:endParaRPr lang="en-US" sz="800" dirty="0"/>
           </a:p>
@@ -8224,54 +9121,6 @@
               <a:t>当前不采集、不保存声音或语音；任何声环境扩展都需另行隐私评审。</a:t>
             </a:r>
             <a:endParaRPr lang="en-US" sz="1150" dirty="0"/>
-          </a:p>
-        </p:txBody>
-      </p:sp>
-      <p:sp>
-        <p:nvSpPr>
-          <p:cNvPr id="25" name="Slide Number Placeholder 0"/>
-          <p:cNvSpPr>
-            <a:spLocks noGrp="1"/>
-          </p:cNvSpPr>
-          <p:nvPr>
-            <p:ph type="sldNum" sz="quarter" idx="4294967295"/>
-          </p:nvPr>
-        </p:nvSpPr>
-        <p:spPr>
-          <a:xfrm>
-            <a:off x="11155680" y="256032"/>
-            <a:ext cx="594360" cy="164592"/>
-          </a:xfrm>
-          <a:prstGeom prst="rect">
-            <a:avLst/>
-          </a:prstGeom>
-          <a:extLst>
-            <a:ext uri="{C572A759-6A51-4108-AA02-DFA0A04FC94B}">
-              <ma14:wrappingTextBoxFlag xmlns:ma14="http://schemas.microsoft.com/office/mac/drawingml/2011/main" val="0"/>
-            </a:ext>
-          </a:extLst>
-        </p:spPr>
-        <p:txBody>
-          <a:bodyPr lIns="0" tIns="0" rIns="0" bIns="0"/>
-          <a:lstStyle>
-            <a:lvl1pPr>
-              <a:defRPr sz="800">
-                <a:solidFill>
-                  <a:srgbClr val="737373"/>
-                </a:solidFill>
-                <a:latin typeface="JetBrains Mono"/>
-                <a:ea typeface="JetBrains Mono"/>
-                <a:cs typeface="JetBrains Mono"/>
-              </a:defRPr>
-            </a:lvl1pPr>
-          </a:lstStyle>
-          <a:p>
-            <a:pPr algn="r"/>
-            <a:fld id="{F7021451-1387-4CA6-816F-3879F97B5CBC}" type="slidenum">
-              <a:rPr b="0" lang="en-US"/>
-              <a:t>4</a:t>
-            </a:fld>
-            <a:endParaRPr lang="en-US"/>
           </a:p>
         </p:txBody>
       </p:sp>
@@ -8376,7 +9225,7 @@
                 <a:ea typeface="JetBrains Mono" pitchFamily="34" charset="-122"/>
                 <a:cs typeface="JetBrains Mono" pitchFamily="34" charset="-120"/>
               </a:rPr>
-              <a:t>05 / 12</a:t>
+              <a:t>05 / 13</a:t>
             </a:r>
             <a:endParaRPr lang="en-US" sz="800" dirty="0"/>
           </a:p>
@@ -9070,54 +9919,6 @@
               <a:t>分析：从 Broker 读取只读遥测镜像                                      控制：只允许经 Home Assistant · 当前默认关闭</a:t>
             </a:r>
             <a:endParaRPr lang="en-US" sz="750" dirty="0"/>
-          </a:p>
-        </p:txBody>
-      </p:sp>
-      <p:sp>
-        <p:nvSpPr>
-          <p:cNvPr id="25" name="Slide Number Placeholder 0"/>
-          <p:cNvSpPr>
-            <a:spLocks noGrp="1"/>
-          </p:cNvSpPr>
-          <p:nvPr>
-            <p:ph type="sldNum" sz="quarter" idx="4294967295"/>
-          </p:nvPr>
-        </p:nvSpPr>
-        <p:spPr>
-          <a:xfrm>
-            <a:off x="11155680" y="256032"/>
-            <a:ext cx="594360" cy="164592"/>
-          </a:xfrm>
-          <a:prstGeom prst="rect">
-            <a:avLst/>
-          </a:prstGeom>
-          <a:extLst>
-            <a:ext uri="{C572A759-6A51-4108-AA02-DFA0A04FC94B}">
-              <ma14:wrappingTextBoxFlag xmlns:ma14="http://schemas.microsoft.com/office/mac/drawingml/2011/main" val="0"/>
-            </a:ext>
-          </a:extLst>
-        </p:spPr>
-        <p:txBody>
-          <a:bodyPr lIns="0" tIns="0" rIns="0" bIns="0"/>
-          <a:lstStyle>
-            <a:lvl1pPr>
-              <a:defRPr sz="800">
-                <a:solidFill>
-                  <a:srgbClr val="737373"/>
-                </a:solidFill>
-                <a:latin typeface="JetBrains Mono"/>
-                <a:ea typeface="JetBrains Mono"/>
-                <a:cs typeface="JetBrains Mono"/>
-              </a:defRPr>
-            </a:lvl1pPr>
-          </a:lstStyle>
-          <a:p>
-            <a:pPr algn="r"/>
-            <a:fld id="{F7021451-1387-4CA6-816F-3879F97B5CBC}" type="slidenum">
-              <a:rPr b="0" lang="en-US"/>
-              <a:t>5</a:t>
-            </a:fld>
-            <a:endParaRPr lang="en-US"/>
           </a:p>
         </p:txBody>
       </p:sp>
@@ -9229,7 +10030,7 @@
                 <a:ea typeface="JetBrains Mono" pitchFamily="34" charset="-122"/>
                 <a:cs typeface="JetBrains Mono" pitchFamily="34" charset="-120"/>
               </a:rPr>
-              <a:t>06 / 12</a:t>
+              <a:t>06 / 13</a:t>
             </a:r>
             <a:endParaRPr lang="en-US" sz="800" dirty="0"/>
           </a:p>
@@ -10646,7 +11447,7 @@
                 <a:ea typeface="JetBrains Mono" pitchFamily="34" charset="-122"/>
                 <a:cs typeface="JetBrains Mono" pitchFamily="34" charset="-120"/>
               </a:rPr>
-              <a:t>08 / 12</a:t>
+              <a:t>08 / 13</a:t>
             </a:r>
             <a:endParaRPr lang="en-US" sz="800" dirty="0"/>
           </a:p>
@@ -11675,54 +12476,6 @@
           </a:p>
         </p:txBody>
       </p:sp>
-      <p:sp>
-        <p:nvSpPr>
-          <p:cNvPr id="25" name="Slide Number Placeholder 0"/>
-          <p:cNvSpPr>
-            <a:spLocks noGrp="1"/>
-          </p:cNvSpPr>
-          <p:nvPr>
-            <p:ph type="sldNum" sz="quarter" idx="4294967295"/>
-          </p:nvPr>
-        </p:nvSpPr>
-        <p:spPr>
-          <a:xfrm>
-            <a:off x="11155680" y="256032"/>
-            <a:ext cx="594360" cy="164592"/>
-          </a:xfrm>
-          <a:prstGeom prst="rect">
-            <a:avLst/>
-          </a:prstGeom>
-          <a:extLst>
-            <a:ext uri="{C572A759-6A51-4108-AA02-DFA0A04FC94B}">
-              <ma14:wrappingTextBoxFlag xmlns:ma14="http://schemas.microsoft.com/office/mac/drawingml/2011/main" val="0"/>
-            </a:ext>
-          </a:extLst>
-        </p:spPr>
-        <p:txBody>
-          <a:bodyPr lIns="0" tIns="0" rIns="0" bIns="0"/>
-          <a:lstStyle>
-            <a:lvl1pPr>
-              <a:defRPr sz="800">
-                <a:solidFill>
-                  <a:srgbClr val="737373"/>
-                </a:solidFill>
-                <a:latin typeface="JetBrains Mono"/>
-                <a:ea typeface="JetBrains Mono"/>
-                <a:cs typeface="JetBrains Mono"/>
-              </a:defRPr>
-            </a:lvl1pPr>
-          </a:lstStyle>
-          <a:p>
-            <a:pPr algn="r"/>
-            <a:fld id="{F7021451-1387-4CA6-816F-3879F97B5CBC}" type="slidenum">
-              <a:rPr b="0" lang="en-US"/>
-              <a:t>8</a:t>
-            </a:fld>
-            <a:endParaRPr lang="en-US"/>
-          </a:p>
-        </p:txBody>
-      </p:sp>
     </p:spTree>
   </p:cSld>
   <p:clrMapOvr>
@@ -11734,13 +12487,6 @@
 <file path=ppt/slides/slide9.xml><?xml version="1.0" encoding="utf-8"?>
 <p:sld xmlns:a="http://schemas.openxmlformats.org/drawingml/2006/main" xmlns:r="http://schemas.openxmlformats.org/officeDocument/2006/relationships" xmlns:p="http://schemas.openxmlformats.org/presentationml/2006/main">
   <p:cSld name="Slide 9">
-    <p:bg>
-      <p:bgPr>
-        <a:solidFill>
-          <a:srgbClr val="0A0A0A"/>
-        </a:solidFill>
-      </p:bgPr>
-    </p:bg>
     <p:spTree>
       <p:nvGrpSpPr>
         <p:cNvPr id="1" name=""/>
@@ -11784,13 +12530,13 @@
             <a:r>
               <a:rPr lang="en-US" sz="800" spc="210" kern="0" dirty="0">
                 <a:solidFill>
-                  <a:srgbClr val="B8B8B8"/>
+                  <a:srgbClr val="737373"/>
                 </a:solidFill>
                 <a:latin typeface="JetBrains Mono" pitchFamily="34" charset="0"/>
                 <a:ea typeface="JetBrains Mono" pitchFamily="34" charset="-122"/>
                 <a:cs typeface="JetBrains Mono" pitchFamily="34" charset="-120"/>
               </a:rPr>
-              <a:t>INTERACTION · CONTROLLED LOOP</a:t>
+              <a:t>EVIDENCE · OPENROUTER</a:t>
             </a:r>
             <a:endParaRPr lang="en-US" sz="800" dirty="0"/>
           </a:p>
@@ -11825,13 +12571,13 @@
             <a:r>
               <a:rPr lang="en-US" sz="800" spc="210" kern="0" dirty="0">
                 <a:solidFill>
-                  <a:srgbClr val="B8B8B8"/>
+                  <a:srgbClr val="737373"/>
                 </a:solidFill>
                 <a:latin typeface="JetBrains Mono" pitchFamily="34" charset="0"/>
                 <a:ea typeface="JetBrains Mono" pitchFamily="34" charset="-122"/>
                 <a:cs typeface="JetBrains Mono" pitchFamily="34" charset="-120"/>
               </a:rPr>
-              <a:t>09 / 12</a:t>
+              <a:t>09 / 13</a:t>
             </a:r>
             <a:endParaRPr lang="en-US" sz="800" dirty="0"/>
           </a:p>
@@ -11866,13 +12612,13 @@
             <a:r>
               <a:rPr lang="en-US" sz="900" spc="130" kern="0" dirty="0">
                 <a:solidFill>
-                  <a:srgbClr val="9C9C9C"/>
+                  <a:srgbClr val="737373"/>
                 </a:solidFill>
                 <a:latin typeface="PingFang SC" pitchFamily="34" charset="0"/>
                 <a:ea typeface="PingFang SC" pitchFamily="34" charset="-122"/>
                 <a:cs typeface="PingFang SC" pitchFamily="34" charset="-120"/>
               </a:rPr>
-              <a:t>不是“说一句就随便执行”</a:t>
+              <a:t>MONTHLY SNAPSHOT · CAPTURED 2026-09-22</a:t>
             </a:r>
             <a:endParaRPr lang="en-US" sz="900" dirty="0"/>
           </a:p>
@@ -11905,17 +12651,17 @@
               <a:buNone/>
             </a:pPr>
             <a:r>
-              <a:rPr lang="en-US" sz="2800" dirty="0">
-                <a:solidFill>
-                  <a:srgbClr val="FAFAF8"/>
+              <a:rPr lang="en-US" sz="2900" dirty="0">
+                <a:solidFill>
+                  <a:srgbClr val="0A0A0A"/>
                 </a:solidFill>
                 <a:latin typeface="PingFang SC" pitchFamily="34" charset="0"/>
                 <a:ea typeface="PingFang SC" pitchFamily="34" charset="-122"/>
                 <a:cs typeface="PingFang SC" pitchFamily="34" charset="-120"/>
               </a:rPr>
-              <a:t>先读状态，再解释；控制以后再开</a:t>
-            </a:r>
-            <a:endParaRPr lang="en-US" sz="2800" dirty="0"/>
+              <a:t>选择 Hermes，不只靠口号</a:t>
+            </a:r>
+            <a:endParaRPr lang="en-US" sz="2900" dirty="0"/>
           </a:p>
         </p:txBody>
       </p:sp>
@@ -11927,16 +12673,16 @@
         </p:nvSpPr>
         <p:spPr>
           <a:xfrm>
-            <a:off x="612648" y="1828800"/>
-            <a:ext cx="4297680" cy="0"/>
+            <a:off x="612648" y="1664208"/>
+            <a:ext cx="3291840" cy="0"/>
           </a:xfrm>
           <a:prstGeom prst="line">
             <a:avLst/>
           </a:prstGeom>
           <a:noFill/>
-          <a:ln w="8890">
+          <a:ln w="19050">
             <a:solidFill>
-              <a:srgbClr val="363636"/>
+              <a:srgbClr val="002FA7"/>
             </a:solidFill>
             <a:prstDash val="solid"/>
           </a:ln>
@@ -11950,36 +12696,36 @@
         </p:nvSpPr>
         <p:spPr>
           <a:xfrm>
-            <a:off x="612648" y="2121408"/>
-            <a:ext cx="347472" cy="201168"/>
-          </a:xfrm>
-          <a:prstGeom prst="rect">
-            <a:avLst/>
-          </a:prstGeom>
-          <a:noFill/>
-          <a:ln/>
-        </p:spPr>
-        <p:txBody>
-          <a:bodyPr wrap="square" lIns="0" tIns="0" rIns="0" bIns="0" rtlCol="0" anchor="ctr">
-            <a:normAutofit/>
-          </a:bodyPr>
-          <a:lstStyle/>
-          <a:p>
-            <a:pPr algn="l" indent="0" marL="0">
-              <a:buNone/>
-            </a:pPr>
-            <a:r>
-              <a:rPr lang="en-US" sz="800" dirty="0">
-                <a:solidFill>
-                  <a:srgbClr val="5B7BFF"/>
+            <a:off x="612648" y="1856232"/>
+            <a:ext cx="3474720" cy="182880"/>
+          </a:xfrm>
+          <a:prstGeom prst="rect">
+            <a:avLst/>
+          </a:prstGeom>
+          <a:noFill/>
+          <a:ln/>
+        </p:spPr>
+        <p:txBody>
+          <a:bodyPr wrap="square" lIns="0" tIns="0" rIns="0" bIns="0" rtlCol="0" anchor="ctr">
+            <a:normAutofit/>
+          </a:bodyPr>
+          <a:lstStyle/>
+          <a:p>
+            <a:pPr algn="l" indent="0" marL="0">
+              <a:buNone/>
+            </a:pPr>
+            <a:r>
+              <a:rPr lang="en-US" sz="850" spc="140" kern="0" dirty="0">
+                <a:solidFill>
+                  <a:srgbClr val="737373"/>
                 </a:solidFill>
                 <a:latin typeface="JetBrains Mono" pitchFamily="34" charset="0"/>
                 <a:ea typeface="JetBrains Mono" pitchFamily="34" charset="-122"/>
                 <a:cs typeface="JetBrains Mono" pitchFamily="34" charset="-120"/>
               </a:rPr>
-              <a:t>01</a:t>
-            </a:r>
-            <a:endParaRPr lang="en-US" sz="800" dirty="0"/>
+              <a:t>OPENROUTER GLOBAL RANKING</a:t>
+            </a:r>
+            <a:endParaRPr lang="en-US" sz="850" dirty="0"/>
           </a:p>
         </p:txBody>
       </p:sp>
@@ -11991,61 +12737,79 @@
         </p:nvSpPr>
         <p:spPr>
           <a:xfrm>
-            <a:off x="1005840" y="2075688"/>
-            <a:ext cx="3886200" cy="292608"/>
-          </a:xfrm>
-          <a:prstGeom prst="rect">
-            <a:avLst/>
-          </a:prstGeom>
-          <a:noFill/>
-          <a:ln/>
-        </p:spPr>
-        <p:txBody>
-          <a:bodyPr wrap="square" lIns="0" tIns="0" rIns="0" bIns="0" rtlCol="0" anchor="ctr">
-            <a:normAutofit/>
-          </a:bodyPr>
-          <a:lstStyle/>
-          <a:p>
-            <a:pPr algn="l" indent="0" marL="0">
-              <a:buNone/>
-            </a:pPr>
-            <a:r>
-              <a:rPr lang="en-US" sz="1250" dirty="0">
-                <a:solidFill>
-                  <a:srgbClr val="FAFAF8"/>
+            <a:off x="612648" y="2212848"/>
+            <a:ext cx="2971800" cy="868680"/>
+          </a:xfrm>
+          <a:prstGeom prst="rect">
+            <a:avLst/>
+          </a:prstGeom>
+          <a:noFill/>
+          <a:ln/>
+        </p:spPr>
+        <p:txBody>
+          <a:bodyPr wrap="square" lIns="0" tIns="0" rIns="0" bIns="0" rtlCol="0" anchor="ctr">
+            <a:normAutofit/>
+          </a:bodyPr>
+          <a:lstStyle/>
+          <a:p>
+            <a:pPr algn="l" indent="0" marL="0">
+              <a:buNone/>
+            </a:pPr>
+            <a:r>
+              <a:rPr lang="en-US" sz="5800" dirty="0">
+                <a:solidFill>
+                  <a:srgbClr val="002FA7"/>
                 </a:solidFill>
                 <a:latin typeface="PingFang SC" pitchFamily="34" charset="0"/>
                 <a:ea typeface="PingFang SC" pitchFamily="34" charset="-122"/>
                 <a:cs typeface="PingFang SC" pitchFamily="34" charset="-120"/>
               </a:rPr>
-              <a:t>用户以自然语言提出问题</a:t>
-            </a:r>
-            <a:endParaRPr lang="en-US" sz="1250" dirty="0"/>
-          </a:p>
-        </p:txBody>
-      </p:sp>
-      <p:sp>
-        <p:nvSpPr>
-          <p:cNvPr id="9" name="Shape 7"/>
-          <p:cNvSpPr/>
-          <p:nvPr/>
-        </p:nvSpPr>
-        <p:spPr>
-          <a:xfrm>
-            <a:off x="612648" y="2862072"/>
-            <a:ext cx="4297680" cy="0"/>
-          </a:xfrm>
-          <a:prstGeom prst="line">
-            <a:avLst/>
-          </a:prstGeom>
-          <a:noFill/>
-          <a:ln w="8890">
-            <a:solidFill>
-              <a:srgbClr val="363636"/>
-            </a:solidFill>
-            <a:prstDash val="solid"/>
-          </a:ln>
-        </p:spPr>
+              <a:t>#1</a:t>
+            </a:r>
+            <a:endParaRPr lang="en-US" sz="5800" dirty="0"/>
+          </a:p>
+        </p:txBody>
+      </p:sp>
+      <p:sp>
+        <p:nvSpPr>
+          <p:cNvPr id="9" name="Text 7"/>
+          <p:cNvSpPr txBox="1"/>
+          <p:nvPr/>
+        </p:nvSpPr>
+        <p:spPr>
+          <a:xfrm>
+            <a:off x="612648" y="3273552"/>
+            <a:ext cx="3246120" cy="658368"/>
+          </a:xfrm>
+          <a:prstGeom prst="rect">
+            <a:avLst/>
+          </a:prstGeom>
+          <a:noFill/>
+          <a:ln/>
+        </p:spPr>
+        <p:txBody>
+          <a:bodyPr wrap="square" lIns="0" tIns="0" rIns="0" bIns="0" rtlCol="0" anchor="ctr">
+            <a:normAutofit/>
+          </a:bodyPr>
+          <a:lstStyle/>
+          <a:p>
+            <a:pPr algn="l" indent="0" marL="0">
+              <a:buNone/>
+            </a:pPr>
+            <a:r>
+              <a:rPr lang="en-US" sz="4000" dirty="0">
+                <a:solidFill>
+                  <a:srgbClr val="0A0A0A"/>
+                </a:solidFill>
+                <a:latin typeface="PingFang SC" pitchFamily="34" charset="0"/>
+                <a:ea typeface="PingFang SC" pitchFamily="34" charset="-122"/>
+                <a:cs typeface="PingFang SC" pitchFamily="34" charset="-120"/>
+              </a:rPr>
+              <a:t>50.8T</a:t>
+            </a:r>
+            <a:endParaRPr lang="en-US" sz="4000" dirty="0"/>
+          </a:p>
+        </p:txBody>
       </p:sp>
       <p:sp>
         <p:nvSpPr>
@@ -12055,689 +12819,222 @@
         </p:nvSpPr>
         <p:spPr>
           <a:xfrm>
-            <a:off x="612648" y="3154680"/>
-            <a:ext cx="347472" cy="201168"/>
-          </a:xfrm>
-          <a:prstGeom prst="rect">
-            <a:avLst/>
-          </a:prstGeom>
-          <a:noFill/>
-          <a:ln/>
-        </p:spPr>
-        <p:txBody>
-          <a:bodyPr wrap="square" lIns="0" tIns="0" rIns="0" bIns="0" rtlCol="0" anchor="ctr">
-            <a:normAutofit/>
-          </a:bodyPr>
-          <a:lstStyle/>
-          <a:p>
-            <a:pPr algn="l" indent="0" marL="0">
-              <a:buNone/>
-            </a:pPr>
-            <a:r>
-              <a:rPr lang="en-US" sz="800" dirty="0">
-                <a:solidFill>
-                  <a:srgbClr val="5B7BFF"/>
+            <a:off x="612648" y="3913632"/>
+            <a:ext cx="3017520" cy="228600"/>
+          </a:xfrm>
+          <a:prstGeom prst="rect">
+            <a:avLst/>
+          </a:prstGeom>
+          <a:noFill/>
+          <a:ln/>
+        </p:spPr>
+        <p:txBody>
+          <a:bodyPr wrap="square" lIns="0" tIns="0" rIns="0" bIns="0" rtlCol="0" anchor="ctr">
+            <a:normAutofit/>
+          </a:bodyPr>
+          <a:lstStyle/>
+          <a:p>
+            <a:pPr algn="l" indent="0" marL="0">
+              <a:buNone/>
+            </a:pPr>
+            <a:r>
+              <a:rPr lang="en-US" sz="1100" dirty="0">
+                <a:solidFill>
+                  <a:srgbClr val="737373"/>
+                </a:solidFill>
+                <a:latin typeface="PingFang SC" pitchFamily="34" charset="0"/>
+                <a:ea typeface="PingFang SC" pitchFamily="34" charset="-122"/>
+                <a:cs typeface="PingFang SC" pitchFamily="34" charset="-120"/>
+              </a:rPr>
+              <a:t>tokens · This Month</a:t>
+            </a:r>
+            <a:endParaRPr lang="en-US" sz="1100" dirty="0"/>
+          </a:p>
+        </p:txBody>
+      </p:sp>
+      <p:sp>
+        <p:nvSpPr>
+          <p:cNvPr id="11" name="Text 9"/>
+          <p:cNvSpPr txBox="1"/>
+          <p:nvPr/>
+        </p:nvSpPr>
+        <p:spPr>
+          <a:xfrm>
+            <a:off x="612648" y="4864608"/>
+            <a:ext cx="2194560" cy="502920"/>
+          </a:xfrm>
+          <a:prstGeom prst="rect">
+            <a:avLst/>
+          </a:prstGeom>
+          <a:noFill/>
+          <a:ln/>
+        </p:spPr>
+        <p:txBody>
+          <a:bodyPr wrap="square" lIns="0" tIns="0" rIns="0" bIns="0" rtlCol="0" anchor="ctr">
+            <a:normAutofit/>
+          </a:bodyPr>
+          <a:lstStyle/>
+          <a:p>
+            <a:pPr algn="l" indent="0" marL="0">
+              <a:buNone/>
+            </a:pPr>
+            <a:r>
+              <a:rPr lang="en-US" sz="3100" dirty="0">
+                <a:solidFill>
+                  <a:srgbClr val="002FA7"/>
+                </a:solidFill>
+                <a:latin typeface="PingFang SC" pitchFamily="34" charset="0"/>
+                <a:ea typeface="PingFang SC" pitchFamily="34" charset="-122"/>
+                <a:cs typeface="PingFang SC" pitchFamily="34" charset="-120"/>
+              </a:rPr>
+              <a:t>2.4×</a:t>
+            </a:r>
+            <a:endParaRPr lang="en-US" sz="3100" dirty="0"/>
+          </a:p>
+        </p:txBody>
+      </p:sp>
+      <p:sp>
+        <p:nvSpPr>
+          <p:cNvPr id="12" name="Text 10"/>
+          <p:cNvSpPr txBox="1"/>
+          <p:nvPr/>
+        </p:nvSpPr>
+        <p:spPr>
+          <a:xfrm>
+            <a:off x="612648" y="5394960"/>
+            <a:ext cx="3246120" cy="585216"/>
+          </a:xfrm>
+          <a:prstGeom prst="rect">
+            <a:avLst/>
+          </a:prstGeom>
+          <a:noFill/>
+          <a:ln/>
+        </p:spPr>
+        <p:txBody>
+          <a:bodyPr wrap="square" lIns="0" tIns="0" rIns="0" bIns="0" rtlCol="0" anchor="ctr">
+            <a:normAutofit/>
+          </a:bodyPr>
+          <a:lstStyle/>
+          <a:p>
+            <a:pPr algn="l" indent="0" marL="0">
+              <a:buNone/>
+            </a:pPr>
+            <a:r>
+              <a:rPr lang="en-US" sz="1150" dirty="0">
+                <a:solidFill>
+                  <a:srgbClr val="0A0A0A"/>
+                </a:solidFill>
+                <a:latin typeface="PingFang SC" pitchFamily="34" charset="0"/>
+                <a:ea typeface="PingFang SC" pitchFamily="34" charset="-122"/>
+                <a:cs typeface="PingFang SC" pitchFamily="34" charset="-120"/>
+              </a:rPr>
+              <a:t>约为截图中第二名 Claude Code（21.1T）的 2.4 倍</a:t>
+            </a:r>
+            <a:endParaRPr lang="en-US" sz="1150" dirty="0"/>
+          </a:p>
+        </p:txBody>
+      </p:sp>
+      <p:pic>
+        <p:nvPicPr>
+          <p:cNvPr id="13" name="Image 0" descr="presentation/dormsense-intro/images/openrouter-global-ranking-2026-09-22.jpg">    </p:cNvPr>
+          <p:cNvPicPr>
+            <a:picLocks noChangeAspect="1"/>
+          </p:cNvPicPr>
+          <p:nvPr/>
+        </p:nvPicPr>
+        <p:blipFill>
+          <a:blip r:embed="rId1"/>
+          <a:stretch>
+            <a:fillRect/>
+          </a:stretch>
+        </p:blipFill>
+        <p:spPr>
+          <a:xfrm>
+            <a:off x="4709160" y="1399032"/>
+            <a:ext cx="6565392" cy="5175504"/>
+          </a:xfrm>
+          <a:prstGeom prst="rect">
+            <a:avLst/>
+          </a:prstGeom>
+        </p:spPr>
+      </p:pic>
+      <p:sp>
+        <p:nvSpPr>
+          <p:cNvPr id="14" name="Text 11"/>
+          <p:cNvSpPr txBox="1"/>
+          <p:nvPr/>
+        </p:nvSpPr>
+        <p:spPr>
+          <a:xfrm>
+            <a:off x="4709160" y="6419088"/>
+            <a:ext cx="3474720" cy="146304"/>
+          </a:xfrm>
+          <a:prstGeom prst="rect">
+            <a:avLst/>
+          </a:prstGeom>
+          <a:noFill/>
+          <a:ln/>
+        </p:spPr>
+        <p:txBody>
+          <a:bodyPr wrap="square" lIns="0" tIns="0" rIns="0" bIns="0" rtlCol="0" anchor="ctr">
+            <a:normAutofit/>
+          </a:bodyPr>
+          <a:lstStyle/>
+          <a:p>
+            <a:pPr algn="l" indent="0" marL="0">
+              <a:buNone/>
+            </a:pPr>
+            <a:r>
+              <a:rPr lang="en-US" sz="750" b="1" spc="100" kern="0" dirty="0">
+                <a:solidFill>
+                  <a:srgbClr val="0A0A0A"/>
                 </a:solidFill>
                 <a:latin typeface="JetBrains Mono" pitchFamily="34" charset="0"/>
                 <a:ea typeface="JetBrains Mono" pitchFamily="34" charset="-122"/>
                 <a:cs typeface="JetBrains Mono" pitchFamily="34" charset="-120"/>
               </a:rPr>
-              <a:t>02</a:t>
-            </a:r>
-            <a:endParaRPr lang="en-US" sz="800" dirty="0"/>
-          </a:p>
-        </p:txBody>
-      </p:sp>
-      <p:sp>
-        <p:nvSpPr>
-          <p:cNvPr id="11" name="Text 9"/>
-          <p:cNvSpPr txBox="1"/>
-          <p:nvPr/>
-        </p:nvSpPr>
-        <p:spPr>
-          <a:xfrm>
-            <a:off x="1005840" y="3108960"/>
-            <a:ext cx="3886200" cy="292608"/>
-          </a:xfrm>
-          <a:prstGeom prst="rect">
-            <a:avLst/>
-          </a:prstGeom>
-          <a:noFill/>
-          <a:ln/>
-        </p:spPr>
-        <p:txBody>
-          <a:bodyPr wrap="square" lIns="0" tIns="0" rIns="0" bIns="0" rtlCol="0" anchor="ctr">
-            <a:normAutofit/>
-          </a:bodyPr>
-          <a:lstStyle/>
-          <a:p>
-            <a:pPr algn="l" indent="0" marL="0">
-              <a:buNone/>
-            </a:pPr>
-            <a:r>
-              <a:rPr lang="en-US" sz="1250" dirty="0">
-                <a:solidFill>
-                  <a:srgbClr val="FAFAF8"/>
-                </a:solidFill>
-                <a:latin typeface="PingFang SC" pitchFamily="34" charset="0"/>
-                <a:ea typeface="PingFang SC" pitchFamily="34" charset="-122"/>
-                <a:cs typeface="PingFang SC" pitchFamily="34" charset="-120"/>
-              </a:rPr>
-              <a:t>Agent 从 HA 读取当前状态</a:t>
-            </a:r>
-            <a:endParaRPr lang="en-US" sz="1250" dirty="0"/>
-          </a:p>
-        </p:txBody>
-      </p:sp>
-      <p:sp>
-        <p:nvSpPr>
-          <p:cNvPr id="12" name="Shape 10"/>
-          <p:cNvSpPr/>
-          <p:nvPr/>
-        </p:nvSpPr>
-        <p:spPr>
-          <a:xfrm>
-            <a:off x="612648" y="3895344"/>
-            <a:ext cx="4297680" cy="0"/>
-          </a:xfrm>
-          <a:prstGeom prst="line">
-            <a:avLst/>
-          </a:prstGeom>
-          <a:noFill/>
-          <a:ln w="8890">
-            <a:solidFill>
-              <a:srgbClr val="363636"/>
-            </a:solidFill>
-            <a:prstDash val="solid"/>
-          </a:ln>
-        </p:spPr>
-      </p:sp>
-      <p:sp>
-        <p:nvSpPr>
-          <p:cNvPr id="13" name="Text 11"/>
-          <p:cNvSpPr txBox="1"/>
-          <p:nvPr/>
-        </p:nvSpPr>
-        <p:spPr>
-          <a:xfrm>
-            <a:off x="612648" y="4187952"/>
-            <a:ext cx="347472" cy="201168"/>
-          </a:xfrm>
-          <a:prstGeom prst="rect">
-            <a:avLst/>
-          </a:prstGeom>
-          <a:noFill/>
-          <a:ln/>
-        </p:spPr>
-        <p:txBody>
-          <a:bodyPr wrap="square" lIns="0" tIns="0" rIns="0" bIns="0" rtlCol="0" anchor="ctr">
-            <a:normAutofit/>
-          </a:bodyPr>
-          <a:lstStyle/>
-          <a:p>
-            <a:pPr algn="l" indent="0" marL="0">
-              <a:buNone/>
-            </a:pPr>
-            <a:r>
-              <a:rPr lang="en-US" sz="800" dirty="0">
-                <a:solidFill>
-                  <a:srgbClr val="5B7BFF"/>
+              <a:t>OPENROUTER GLOBAL RANKING</a:t>
+            </a:r>
+            <a:endParaRPr lang="en-US" sz="750" dirty="0"/>
+          </a:p>
+        </p:txBody>
+      </p:sp>
+      <p:sp>
+        <p:nvSpPr>
+          <p:cNvPr id="15" name="Text 12"/>
+          <p:cNvSpPr txBox="1"/>
+          <p:nvPr/>
+        </p:nvSpPr>
+        <p:spPr>
+          <a:xfrm>
+            <a:off x="8412480" y="6419088"/>
+            <a:ext cx="2834640" cy="146304"/>
+          </a:xfrm>
+          <a:prstGeom prst="rect">
+            <a:avLst/>
+          </a:prstGeom>
+          <a:noFill/>
+          <a:ln/>
+        </p:spPr>
+        <p:txBody>
+          <a:bodyPr wrap="square" lIns="0" tIns="0" rIns="0" bIns="0" rtlCol="0" anchor="ctr">
+            <a:normAutofit/>
+          </a:bodyPr>
+          <a:lstStyle/>
+          <a:p>
+            <a:pPr algn="r" indent="0" marL="0">
+              <a:buNone/>
+            </a:pPr>
+            <a:r>
+              <a:rPr lang="en-US" sz="750" dirty="0">
+                <a:solidFill>
+                  <a:srgbClr val="737373"/>
                 </a:solidFill>
                 <a:latin typeface="JetBrains Mono" pitchFamily="34" charset="0"/>
                 <a:ea typeface="JetBrains Mono" pitchFamily="34" charset="-122"/>
                 <a:cs typeface="JetBrains Mono" pitchFamily="34" charset="-120"/>
               </a:rPr>
-              <a:t>03</a:t>
-            </a:r>
-            <a:endParaRPr lang="en-US" sz="800" dirty="0"/>
-          </a:p>
-        </p:txBody>
-      </p:sp>
-      <p:sp>
-        <p:nvSpPr>
-          <p:cNvPr id="14" name="Text 12"/>
-          <p:cNvSpPr txBox="1"/>
-          <p:nvPr/>
-        </p:nvSpPr>
-        <p:spPr>
-          <a:xfrm>
-            <a:off x="1005840" y="4142232"/>
-            <a:ext cx="3886200" cy="292608"/>
-          </a:xfrm>
-          <a:prstGeom prst="rect">
-            <a:avLst/>
-          </a:prstGeom>
-          <a:noFill/>
-          <a:ln/>
-        </p:spPr>
-        <p:txBody>
-          <a:bodyPr wrap="square" lIns="0" tIns="0" rIns="0" bIns="0" rtlCol="0" anchor="ctr">
-            <a:normAutofit/>
-          </a:bodyPr>
-          <a:lstStyle/>
-          <a:p>
-            <a:pPr algn="l" indent="0" marL="0">
-              <a:buNone/>
-            </a:pPr>
-            <a:r>
-              <a:rPr lang="en-US" sz="1250" dirty="0">
-                <a:solidFill>
-                  <a:srgbClr val="FAFAF8"/>
-                </a:solidFill>
-                <a:latin typeface="PingFang SC" pitchFamily="34" charset="0"/>
-                <a:ea typeface="PingFang SC" pitchFamily="34" charset="-122"/>
-                <a:cs typeface="PingFang SC" pitchFamily="34" charset="-120"/>
-              </a:rPr>
-              <a:t>解释数据、时效与不确定性</a:t>
-            </a:r>
-            <a:endParaRPr lang="en-US" sz="1250" dirty="0"/>
-          </a:p>
-        </p:txBody>
-      </p:sp>
-      <p:sp>
-        <p:nvSpPr>
-          <p:cNvPr id="15" name="Shape 13"/>
-          <p:cNvSpPr/>
-          <p:nvPr/>
-        </p:nvSpPr>
-        <p:spPr>
-          <a:xfrm>
-            <a:off x="612648" y="4928616"/>
-            <a:ext cx="4297680" cy="0"/>
-          </a:xfrm>
-          <a:prstGeom prst="line">
-            <a:avLst/>
-          </a:prstGeom>
-          <a:noFill/>
-          <a:ln w="8890">
-            <a:solidFill>
-              <a:srgbClr val="363636"/>
-            </a:solidFill>
-            <a:prstDash val="solid"/>
-          </a:ln>
-        </p:spPr>
-      </p:sp>
-      <p:sp>
-        <p:nvSpPr>
-          <p:cNvPr id="16" name="Text 14"/>
-          <p:cNvSpPr txBox="1"/>
-          <p:nvPr/>
-        </p:nvSpPr>
-        <p:spPr>
-          <a:xfrm>
-            <a:off x="612648" y="5221224"/>
-            <a:ext cx="347472" cy="201168"/>
-          </a:xfrm>
-          <a:prstGeom prst="rect">
-            <a:avLst/>
-          </a:prstGeom>
-          <a:noFill/>
-          <a:ln/>
-        </p:spPr>
-        <p:txBody>
-          <a:bodyPr wrap="square" lIns="0" tIns="0" rIns="0" bIns="0" rtlCol="0" anchor="ctr">
-            <a:normAutofit/>
-          </a:bodyPr>
-          <a:lstStyle/>
-          <a:p>
-            <a:pPr algn="l" indent="0" marL="0">
-              <a:buNone/>
-            </a:pPr>
-            <a:r>
-              <a:rPr lang="en-US" sz="800" dirty="0">
-                <a:solidFill>
-                  <a:srgbClr val="5B7BFF"/>
-                </a:solidFill>
-                <a:latin typeface="JetBrains Mono" pitchFamily="34" charset="0"/>
-                <a:ea typeface="JetBrains Mono" pitchFamily="34" charset="-122"/>
-                <a:cs typeface="JetBrains Mono" pitchFamily="34" charset="-120"/>
-              </a:rPr>
-              <a:t>04</a:t>
-            </a:r>
-            <a:endParaRPr lang="en-US" sz="800" dirty="0"/>
-          </a:p>
-        </p:txBody>
-      </p:sp>
-      <p:sp>
-        <p:nvSpPr>
-          <p:cNvPr id="17" name="Text 15"/>
-          <p:cNvSpPr txBox="1"/>
-          <p:nvPr/>
-        </p:nvSpPr>
-        <p:spPr>
-          <a:xfrm>
-            <a:off x="1005840" y="5175504"/>
-            <a:ext cx="3886200" cy="292608"/>
-          </a:xfrm>
-          <a:prstGeom prst="rect">
-            <a:avLst/>
-          </a:prstGeom>
-          <a:noFill/>
-          <a:ln/>
-        </p:spPr>
-        <p:txBody>
-          <a:bodyPr wrap="square" lIns="0" tIns="0" rIns="0" bIns="0" rtlCol="0" anchor="ctr">
-            <a:normAutofit/>
-          </a:bodyPr>
-          <a:lstStyle/>
-          <a:p>
-            <a:pPr algn="l" indent="0" marL="0">
-              <a:buNone/>
-            </a:pPr>
-            <a:r>
-              <a:rPr lang="en-US" sz="1250" dirty="0">
-                <a:solidFill>
-                  <a:srgbClr val="FAFAF8"/>
-                </a:solidFill>
-                <a:latin typeface="PingFang SC" pitchFamily="34" charset="0"/>
-                <a:ea typeface="PingFang SC" pitchFamily="34" charset="-122"/>
-                <a:cs typeface="PingFang SC" pitchFamily="34" charset="-120"/>
-              </a:rPr>
-              <a:t>未来经确认后调用低风险场景</a:t>
-            </a:r>
-            <a:endParaRPr lang="en-US" sz="1250" dirty="0"/>
-          </a:p>
-        </p:txBody>
-      </p:sp>
-      <p:sp>
-        <p:nvSpPr>
-          <p:cNvPr id="18" name="Shape 16"/>
-          <p:cNvSpPr/>
-          <p:nvPr/>
-        </p:nvSpPr>
-        <p:spPr>
-          <a:xfrm>
-            <a:off x="612648" y="5961888"/>
-            <a:ext cx="4297680" cy="0"/>
-          </a:xfrm>
-          <a:prstGeom prst="line">
-            <a:avLst/>
-          </a:prstGeom>
-          <a:noFill/>
-          <a:ln w="8890">
-            <a:solidFill>
-              <a:srgbClr val="363636"/>
-            </a:solidFill>
-            <a:prstDash val="solid"/>
-          </a:ln>
-        </p:spPr>
-      </p:sp>
-      <p:sp>
-        <p:nvSpPr>
-          <p:cNvPr id="19" name="Shape 17"/>
-          <p:cNvSpPr/>
-          <p:nvPr/>
-        </p:nvSpPr>
-        <p:spPr>
-          <a:xfrm>
-            <a:off x="6876288" y="2212848"/>
-            <a:ext cx="3246120" cy="3246120"/>
-          </a:xfrm>
-          <a:prstGeom prst="ellipse">
-            <a:avLst/>
-          </a:prstGeom>
-          <a:solidFill>
-            <a:srgbClr val="0A0A0A">
-              <a:alpha val="0"/>
-            </a:srgbClr>
-          </a:solidFill>
-          <a:ln w="16510">
-            <a:solidFill>
-              <a:srgbClr val="5B7BFF"/>
-            </a:solidFill>
-            <a:prstDash val="solid"/>
-          </a:ln>
-        </p:spPr>
-      </p:sp>
-      <p:sp>
-        <p:nvSpPr>
-          <p:cNvPr id="20" name="Text 18"/>
-          <p:cNvSpPr txBox="1"/>
-          <p:nvPr/>
-        </p:nvSpPr>
-        <p:spPr>
-          <a:xfrm>
-            <a:off x="7909560" y="1828800"/>
-            <a:ext cx="1097280" cy="182880"/>
-          </a:xfrm>
-          <a:prstGeom prst="rect">
-            <a:avLst/>
-          </a:prstGeom>
-          <a:noFill/>
-          <a:ln/>
-        </p:spPr>
-        <p:txBody>
-          <a:bodyPr wrap="square" lIns="0" tIns="0" rIns="0" bIns="0" rtlCol="0" anchor="ctr">
-            <a:normAutofit/>
-          </a:bodyPr>
-          <a:lstStyle/>
-          <a:p>
-            <a:pPr algn="ctr" indent="0" marL="0">
-              <a:buNone/>
-            </a:pPr>
-            <a:r>
-              <a:rPr lang="en-US" sz="800" spc="150" kern="0" dirty="0">
-                <a:solidFill>
-                  <a:srgbClr val="FAFAF8"/>
-                </a:solidFill>
-                <a:latin typeface="JetBrains Mono" pitchFamily="34" charset="0"/>
-                <a:ea typeface="JetBrains Mono" pitchFamily="34" charset="-122"/>
-                <a:cs typeface="JetBrains Mono" pitchFamily="34" charset="-120"/>
-              </a:rPr>
-              <a:t>ASK</a:t>
-            </a:r>
-            <a:endParaRPr lang="en-US" sz="800" dirty="0"/>
-          </a:p>
-        </p:txBody>
-      </p:sp>
-      <p:sp>
-        <p:nvSpPr>
-          <p:cNvPr id="21" name="Text 19"/>
-          <p:cNvSpPr txBox="1"/>
-          <p:nvPr/>
-        </p:nvSpPr>
-        <p:spPr>
-          <a:xfrm>
-            <a:off x="10332720" y="3749040"/>
-            <a:ext cx="1097280" cy="182880"/>
-          </a:xfrm>
-          <a:prstGeom prst="rect">
-            <a:avLst/>
-          </a:prstGeom>
-          <a:noFill/>
-          <a:ln/>
-        </p:spPr>
-        <p:txBody>
-          <a:bodyPr wrap="square" lIns="0" tIns="0" rIns="0" bIns="0" rtlCol="0" anchor="ctr">
-            <a:normAutofit/>
-          </a:bodyPr>
-          <a:lstStyle/>
-          <a:p>
-            <a:pPr algn="ctr" indent="0" marL="0">
-              <a:buNone/>
-            </a:pPr>
-            <a:r>
-              <a:rPr lang="en-US" sz="800" spc="150" kern="0" dirty="0">
-                <a:solidFill>
-                  <a:srgbClr val="FAFAF8"/>
-                </a:solidFill>
-                <a:latin typeface="JetBrains Mono" pitchFamily="34" charset="0"/>
-                <a:ea typeface="JetBrains Mono" pitchFamily="34" charset="-122"/>
-                <a:cs typeface="JetBrains Mono" pitchFamily="34" charset="-120"/>
-              </a:rPr>
-              <a:t>READ</a:t>
-            </a:r>
-            <a:endParaRPr lang="en-US" sz="800" dirty="0"/>
-          </a:p>
-        </p:txBody>
-      </p:sp>
-      <p:sp>
-        <p:nvSpPr>
-          <p:cNvPr id="22" name="Text 20"/>
-          <p:cNvSpPr txBox="1"/>
-          <p:nvPr/>
-        </p:nvSpPr>
-        <p:spPr>
-          <a:xfrm>
-            <a:off x="7818120" y="5650992"/>
-            <a:ext cx="1097280" cy="182880"/>
-          </a:xfrm>
-          <a:prstGeom prst="rect">
-            <a:avLst/>
-          </a:prstGeom>
-          <a:noFill/>
-          <a:ln/>
-        </p:spPr>
-        <p:txBody>
-          <a:bodyPr wrap="square" lIns="0" tIns="0" rIns="0" bIns="0" rtlCol="0" anchor="ctr">
-            <a:normAutofit/>
-          </a:bodyPr>
-          <a:lstStyle/>
-          <a:p>
-            <a:pPr algn="ctr" indent="0" marL="0">
-              <a:buNone/>
-            </a:pPr>
-            <a:r>
-              <a:rPr lang="en-US" sz="800" spc="150" kern="0" dirty="0">
-                <a:solidFill>
-                  <a:srgbClr val="FAFAF8"/>
-                </a:solidFill>
-                <a:latin typeface="JetBrains Mono" pitchFamily="34" charset="0"/>
-                <a:ea typeface="JetBrains Mono" pitchFamily="34" charset="-122"/>
-                <a:cs typeface="JetBrains Mono" pitchFamily="34" charset="-120"/>
-              </a:rPr>
-              <a:t>EXPLAIN</a:t>
-            </a:r>
-            <a:endParaRPr lang="en-US" sz="800" dirty="0"/>
-          </a:p>
-        </p:txBody>
-      </p:sp>
-      <p:sp>
-        <p:nvSpPr>
-          <p:cNvPr id="23" name="Text 21"/>
-          <p:cNvSpPr txBox="1"/>
-          <p:nvPr/>
-        </p:nvSpPr>
-        <p:spPr>
-          <a:xfrm>
-            <a:off x="5486400" y="3749040"/>
-            <a:ext cx="1097280" cy="182880"/>
-          </a:xfrm>
-          <a:prstGeom prst="rect">
-            <a:avLst/>
-          </a:prstGeom>
-          <a:noFill/>
-          <a:ln/>
-        </p:spPr>
-        <p:txBody>
-          <a:bodyPr wrap="square" lIns="0" tIns="0" rIns="0" bIns="0" rtlCol="0" anchor="ctr">
-            <a:normAutofit/>
-          </a:bodyPr>
-          <a:lstStyle/>
-          <a:p>
-            <a:pPr algn="ctr" indent="0" marL="0">
-              <a:buNone/>
-            </a:pPr>
-            <a:r>
-              <a:rPr lang="en-US" sz="800" spc="150" kern="0" dirty="0">
-                <a:solidFill>
-                  <a:srgbClr val="FAFAF8"/>
-                </a:solidFill>
-                <a:latin typeface="JetBrains Mono" pitchFamily="34" charset="0"/>
-                <a:ea typeface="JetBrains Mono" pitchFamily="34" charset="-122"/>
-                <a:cs typeface="JetBrains Mono" pitchFamily="34" charset="-120"/>
-              </a:rPr>
-              <a:t>CONFIRM</a:t>
-            </a:r>
-            <a:endParaRPr lang="en-US" sz="800" dirty="0"/>
-          </a:p>
-        </p:txBody>
-      </p:sp>
-      <p:sp>
-        <p:nvSpPr>
-          <p:cNvPr id="24" name="Shape 22"/>
-          <p:cNvSpPr/>
-          <p:nvPr/>
-        </p:nvSpPr>
-        <p:spPr>
-          <a:xfrm>
-            <a:off x="8439912" y="2130552"/>
-            <a:ext cx="128016" cy="128016"/>
-          </a:xfrm>
-          <a:prstGeom prst="ellipse">
-            <a:avLst/>
-          </a:prstGeom>
-          <a:solidFill>
-            <a:srgbClr val="5B7BFF"/>
-          </a:solidFill>
-          <a:ln w="12700">
-            <a:solidFill>
-              <a:srgbClr val="5B7BFF">
-                <a:alpha val="0"/>
-              </a:srgbClr>
-            </a:solidFill>
-            <a:prstDash val="solid"/>
-          </a:ln>
-        </p:spPr>
-      </p:sp>
-      <p:sp>
-        <p:nvSpPr>
-          <p:cNvPr id="25" name="Shape 23"/>
-          <p:cNvSpPr/>
-          <p:nvPr/>
-        </p:nvSpPr>
-        <p:spPr>
-          <a:xfrm>
-            <a:off x="10040112" y="3767328"/>
-            <a:ext cx="128016" cy="128016"/>
-          </a:xfrm>
-          <a:prstGeom prst="ellipse">
-            <a:avLst/>
-          </a:prstGeom>
-          <a:solidFill>
-            <a:srgbClr val="5B7BFF"/>
-          </a:solidFill>
-          <a:ln w="12700">
-            <a:solidFill>
-              <a:srgbClr val="5B7BFF">
-                <a:alpha val="0"/>
-              </a:srgbClr>
-            </a:solidFill>
-            <a:prstDash val="solid"/>
-          </a:ln>
-        </p:spPr>
-      </p:sp>
-      <p:sp>
-        <p:nvSpPr>
-          <p:cNvPr id="26" name="Shape 24"/>
-          <p:cNvSpPr/>
-          <p:nvPr/>
-        </p:nvSpPr>
-        <p:spPr>
-          <a:xfrm>
-            <a:off x="8439912" y="5376672"/>
-            <a:ext cx="128016" cy="128016"/>
-          </a:xfrm>
-          <a:prstGeom prst="ellipse">
-            <a:avLst/>
-          </a:prstGeom>
-          <a:solidFill>
-            <a:srgbClr val="5B7BFF"/>
-          </a:solidFill>
-          <a:ln w="12700">
-            <a:solidFill>
-              <a:srgbClr val="5B7BFF">
-                <a:alpha val="0"/>
-              </a:srgbClr>
-            </a:solidFill>
-            <a:prstDash val="solid"/>
-          </a:ln>
-        </p:spPr>
-      </p:sp>
-      <p:sp>
-        <p:nvSpPr>
-          <p:cNvPr id="27" name="Shape 25"/>
-          <p:cNvSpPr/>
-          <p:nvPr/>
-        </p:nvSpPr>
-        <p:spPr>
-          <a:xfrm>
-            <a:off x="6812280" y="3767328"/>
-            <a:ext cx="128016" cy="128016"/>
-          </a:xfrm>
-          <a:prstGeom prst="ellipse">
-            <a:avLst/>
-          </a:prstGeom>
-          <a:solidFill>
-            <a:srgbClr val="5B7BFF"/>
-          </a:solidFill>
-          <a:ln w="12700">
-            <a:solidFill>
-              <a:srgbClr val="5B7BFF">
-                <a:alpha val="0"/>
-              </a:srgbClr>
-            </a:solidFill>
-            <a:prstDash val="solid"/>
-          </a:ln>
-        </p:spPr>
-      </p:sp>
-      <p:sp>
-        <p:nvSpPr>
-          <p:cNvPr id="28" name="Text 26"/>
-          <p:cNvSpPr txBox="1"/>
-          <p:nvPr/>
-        </p:nvSpPr>
-        <p:spPr>
-          <a:xfrm>
-            <a:off x="7543800" y="3520440"/>
-            <a:ext cx="1920240" cy="457200"/>
-          </a:xfrm>
-          <a:prstGeom prst="rect">
-            <a:avLst/>
-          </a:prstGeom>
-          <a:noFill/>
-          <a:ln/>
-        </p:spPr>
-        <p:txBody>
-          <a:bodyPr wrap="square" lIns="0" tIns="0" rIns="0" bIns="0" rtlCol="0" anchor="ctr">
-            <a:normAutofit/>
-          </a:bodyPr>
-          <a:lstStyle/>
-          <a:p>
-            <a:pPr algn="ctr" indent="0" marL="0">
-              <a:buNone/>
-            </a:pPr>
-            <a:r>
-              <a:rPr lang="en-US" sz="3000" dirty="0">
-                <a:solidFill>
-                  <a:srgbClr val="FAFAF8"/>
-                </a:solidFill>
-                <a:latin typeface="PingFang SC" pitchFamily="34" charset="0"/>
-                <a:ea typeface="PingFang SC" pitchFamily="34" charset="-122"/>
-                <a:cs typeface="PingFang SC" pitchFamily="34" charset="-120"/>
-              </a:rPr>
-              <a:t>LOOP</a:t>
-            </a:r>
-            <a:endParaRPr lang="en-US" sz="3000" dirty="0"/>
-          </a:p>
-        </p:txBody>
-      </p:sp>
-      <p:sp>
-        <p:nvSpPr>
-          <p:cNvPr id="29" name="Text 27"/>
-          <p:cNvSpPr txBox="1"/>
-          <p:nvPr/>
-        </p:nvSpPr>
-        <p:spPr>
-          <a:xfrm>
-            <a:off x="7178040" y="3986784"/>
-            <a:ext cx="2651760" cy="182880"/>
-          </a:xfrm>
-          <a:prstGeom prst="rect">
-            <a:avLst/>
-          </a:prstGeom>
-          <a:noFill/>
-          <a:ln/>
-        </p:spPr>
-        <p:txBody>
-          <a:bodyPr wrap="square" lIns="0" tIns="0" rIns="0" bIns="0" rtlCol="0" anchor="ctr">
-            <a:normAutofit/>
-          </a:bodyPr>
-          <a:lstStyle/>
-          <a:p>
-            <a:pPr algn="ctr" indent="0" marL="0">
-              <a:buNone/>
-            </a:pPr>
-            <a:r>
-              <a:rPr lang="en-US" sz="750" spc="110" kern="0" dirty="0">
-                <a:solidFill>
-                  <a:srgbClr val="B8B8B8"/>
-                </a:solidFill>
-                <a:latin typeface="JetBrains Mono" pitchFamily="34" charset="0"/>
-                <a:ea typeface="JetBrains Mono" pitchFamily="34" charset="-122"/>
-                <a:cs typeface="JetBrains Mono" pitchFamily="34" charset="-120"/>
-              </a:rPr>
-              <a:t>READ · EXPLAIN · CONFIRM</a:t>
+              <a:t>截图时点数据 · 排名会动态变化</a:t>
             </a:r>
             <a:endParaRPr lang="en-US" sz="750" dirty="0"/>
           </a:p>
